--- a/fixtures/manual-check/pptx-showcase.pptx
+++ b/fixtures/manual-check/pptx-showcase.pptx
@@ -6,7 +6,7 @@
   </p:sldMasterIdLst>
   <p:sldIdLst>
     <p:sldId xmlns:r="http://schemas.openxmlformats.org/officeDocument/2006/relationships" id="256" r:id="rId2"/>
-    <p:sldId id="257" r:id="Ree9c6cec9597407d"/>
+    <p:sldId id="257" r:id="Rfc05c4074b694cc8"/>
   </p:sldIdLst>
   <p:sldSz cx="12192000" cy="6858000"/>
   <p:notesSz cx="6858000" cy="9144000"/>
@@ -35,7 +35,7 @@
 </file>
 
 <file path=ppt/slideLayouts/slideMasters/slideMaster1.xml><?xml version="1.0" encoding="utf-8"?>
-<p:sldMaster xmlns:p="http://schemas.openxmlformats.org/presentationml/2006/main">
+<p:sldMaster xmlns:a="http://schemas.openxmlformats.org/drawingml/2006/main" xmlns:r="http://schemas.openxmlformats.org/officeDocument/2006/relationships" xmlns:p="http://schemas.openxmlformats.org/presentationml/2006/main">
   <p:cSld>
     <p:spTree>
       <p:nvGrpSpPr>

--- a/fixtures/manual-check/pptx-showcase.pptx
+++ b/fixtures/manual-check/pptx-showcase.pptx
@@ -4,14 +4,188 @@
   <p:sldMasterIdLst>
     <p:sldMasterId xmlns:r="http://schemas.openxmlformats.org/officeDocument/2006/relationships" id="2147483648" r:id="rId1"/>
   </p:sldMasterIdLst>
+  <p:notesMasterIdLst>
+    <p:notesMasterId r:id="R4c0ee55e69c74b69"/>
+  </p:notesMasterIdLst>
   <p:sldIdLst>
     <p:sldId xmlns:r="http://schemas.openxmlformats.org/officeDocument/2006/relationships" id="256" r:id="rId2"/>
-    <p:sldId id="257" r:id="Rfc05c4074b694cc8"/>
+    <p:sldId id="257" r:id="R21b073197730402e"/>
+    <p:sldId id="258" r:id="Raaacc6aa23c9451a"/>
   </p:sldIdLst>
   <p:sldSz cx="12192000" cy="6858000"/>
   <p:notesSz cx="6858000" cy="9144000"/>
   <p:defaultTextStyle/>
 </p:presentation>
+</file>
+
+<file path=ppt/notesMasters/notesMaster1.xml><?xml version="1.0" encoding="utf-8"?>
+<p:notesMaster xmlns:p="http://schemas.openxmlformats.org/presentationml/2006/main">
+  <p:cSld>
+    <p:spTree>
+      <p:nvGrpSpPr>
+        <p:cNvPr id="1" name=""/>
+        <p:cNvGrpSpPr/>
+        <p:nvPr/>
+      </p:nvGrpSpPr>
+      <p:grpSpPr>
+        <a:xfrm xmlns:a="http://schemas.openxmlformats.org/drawingml/2006/main"/>
+      </p:grpSpPr>
+    </p:spTree>
+  </p:cSld>
+  <p:clrMap bg1="lt1" tx1="dk1" bg2="lt2" tx2="dk2" accent1="accent1" accent2="accent2" accent3="accent3" accent4="accent4" accent5="accent5" accent6="accent6" hlink="hlink" folHlink="folHlink"/>
+  <p:notesStyle/>
+</p:notesMaster>
+</file>
+
+<file path=ppt/notesMasters/theme/theme2.xml><?xml version="1.0" encoding="utf-8"?>
+<a:theme xmlns:a="http://schemas.openxmlformats.org/drawingml/2006/main" name="AIOffice">
+  <a:themeElements>
+    <a:clrScheme name="AIOffice">
+      <a:dk1>
+        <a:sysClr val="windowText" lastClr="000000"/>
+      </a:dk1>
+      <a:lt1>
+        <a:sysClr val="window" lastClr="FFFFFF"/>
+      </a:lt1>
+      <a:dk2>
+        <a:srgbClr val="44546A"/>
+      </a:dk2>
+      <a:lt2>
+        <a:srgbClr val="E7E6E6"/>
+      </a:lt2>
+      <a:accent1>
+        <a:srgbClr val="4472C4"/>
+      </a:accent1>
+      <a:accent2>
+        <a:srgbClr val="ED7D31"/>
+      </a:accent2>
+      <a:accent3>
+        <a:srgbClr val="A5A5A5"/>
+      </a:accent3>
+      <a:accent4>
+        <a:srgbClr val="FFC000"/>
+      </a:accent4>
+      <a:accent5>
+        <a:srgbClr val="5B9BD5"/>
+      </a:accent5>
+      <a:accent6>
+        <a:srgbClr val="70AD47"/>
+      </a:accent6>
+      <a:hlink>
+        <a:srgbClr val="0563C1"/>
+      </a:hlink>
+      <a:folHlink>
+        <a:srgbClr val="954F72"/>
+      </a:folHlink>
+    </a:clrScheme>
+    <a:fontScheme name="AIOffice">
+      <a:majorFont>
+        <a:latin typeface="Calibri Light"/>
+        <a:ea typeface=""/>
+        <a:cs typeface=""/>
+      </a:majorFont>
+      <a:minorFont>
+        <a:latin typeface="Calibri"/>
+        <a:ea typeface=""/>
+        <a:cs typeface=""/>
+      </a:minorFont>
+    </a:fontScheme>
+    <a:fmtScheme name="AIOffice">
+      <a:fillStyleLst>
+        <a:solidFill>
+          <a:schemeClr val="phClr"/>
+        </a:solidFill>
+        <a:solidFill>
+          <a:schemeClr val="phClr"/>
+        </a:solidFill>
+        <a:solidFill>
+          <a:schemeClr val="phClr"/>
+        </a:solidFill>
+      </a:fillStyleLst>
+      <a:lnStyleLst>
+        <a:ln w="9525">
+          <a:solidFill>
+            <a:schemeClr val="phClr"/>
+          </a:solidFill>
+        </a:ln>
+        <a:ln w="9525">
+          <a:solidFill>
+            <a:schemeClr val="phClr"/>
+          </a:solidFill>
+        </a:ln>
+        <a:ln w="9525">
+          <a:solidFill>
+            <a:schemeClr val="phClr"/>
+          </a:solidFill>
+        </a:ln>
+      </a:lnStyleLst>
+      <a:effectStyleLst>
+        <a:effectStyle>
+          <a:effectLst/>
+        </a:effectStyle>
+        <a:effectStyle>
+          <a:effectLst/>
+        </a:effectStyle>
+        <a:effectStyle>
+          <a:effectLst/>
+        </a:effectStyle>
+      </a:effectStyleLst>
+      <a:bgFillStyleLst>
+        <a:solidFill>
+          <a:schemeClr val="phClr"/>
+        </a:solidFill>
+        <a:solidFill>
+          <a:schemeClr val="phClr"/>
+        </a:solidFill>
+        <a:solidFill>
+          <a:schemeClr val="phClr"/>
+        </a:solidFill>
+      </a:bgFillStyleLst>
+    </a:fmtScheme>
+  </a:themeElements>
+</a:theme>
+</file>
+
+<file path=ppt/notesSlides/notesSlide1.xml><?xml version="1.0" encoding="utf-8"?>
+<p:notes xmlns:p="http://schemas.openxmlformats.org/presentationml/2006/main">
+  <p:cSld>
+    <p:spTree>
+      <p:nvGrpSpPr>
+        <p:cNvPr id="1" name=""/>
+        <p:cNvGrpSpPr/>
+        <p:nvPr/>
+      </p:nvGrpSpPr>
+      <p:grpSpPr>
+        <a:xfrm xmlns:a="http://schemas.openxmlformats.org/drawingml/2006/main"/>
+      </p:grpSpPr>
+      <p:sp>
+        <p:nvSpPr>
+          <p:cNvPr id="2" name="Notes Placeholder"/>
+          <p:cNvSpPr>
+            <a:spLocks xmlns:a="http://schemas.openxmlformats.org/drawingml/2006/main" noGrp="1"/>
+          </p:cNvSpPr>
+          <p:nvPr>
+            <p:ph type="body" idx="1"/>
+          </p:nvPr>
+        </p:nvSpPr>
+        <p:spPr/>
+        <p:txBody>
+          <a:bodyPr xmlns:a="http://schemas.openxmlformats.org/drawingml/2006/main"/>
+          <a:lstStyle xmlns:a="http://schemas.openxmlformats.org/drawingml/2006/main"/>
+          <a:p xmlns:a="http://schemas.openxmlformats.org/drawingml/2006/main">
+            <a:r>
+              <a:rPr lang="en-US"/>
+              <a:t>Speaker notes written by aioffice — check presenter view.</a:t>
+            </a:r>
+          </a:p>
+        </p:txBody>
+      </p:sp>
+    </p:spTree>
+  </p:cSld>
+  <p:clrMapOvr>
+    <a:masterClrMapping xmlns:a="http://schemas.openxmlformats.org/drawingml/2006/main"/>
+  </p:clrMapOvr>
+</p:notes>
 </file>
 
 <file path=ppt/slideLayouts/slideLayout1.xml><?xml version="1.0" encoding="utf-8"?>
@@ -329,4 +503,86 @@
     <a:masterClrMapping xmlns:a="http://schemas.openxmlformats.org/drawingml/2006/main"/>
   </p:clrMapOvr>
 </p:sld>
+</file>
+
+<file path=ppt/slides/slide3.xml><?xml version="1.0" encoding="utf-8"?>
+<p:sld xmlns:p="http://schemas.openxmlformats.org/presentationml/2006/main">
+  <p:cSld>
+    <p:bg>
+      <p:bgPr>
+        <a:solidFill xmlns:a="http://schemas.openxmlformats.org/drawingml/2006/main">
+          <a:srgbClr val="E2E8F0"/>
+        </a:solidFill>
+        <a:effectLst xmlns:a="http://schemas.openxmlformats.org/drawingml/2006/main"/>
+      </p:bgPr>
+    </p:bg>
+    <p:spTree>
+      <p:nvGrpSpPr>
+        <p:cNvPr id="1" name=""/>
+        <p:cNvGrpSpPr/>
+        <p:nvPr/>
+      </p:nvGrpSpPr>
+      <p:grpSpPr>
+        <a:xfrm xmlns:a="http://schemas.openxmlformats.org/drawingml/2006/main"/>
+      </p:grpSpPr>
+      <p:sp>
+        <p:nvSpPr>
+          <p:cNvPr id="2" name="Title"/>
+          <p:cNvSpPr>
+            <a:spLocks xmlns:a="http://schemas.openxmlformats.org/drawingml/2006/main" noGrp="1"/>
+          </p:cNvSpPr>
+          <p:nvPr>
+            <p:ph type="title"/>
+          </p:nvPr>
+        </p:nvSpPr>
+        <p:spPr>
+          <a:xfrm xmlns:a="http://schemas.openxmlformats.org/drawingml/2006/main">
+            <a:off x="831850" y="365125"/>
+            <a:ext cx="10515600" cy="1325563"/>
+          </a:xfrm>
+          <a:prstGeom xmlns:a="http://schemas.openxmlformats.org/drawingml/2006/main" prst="rect">
+            <a:avLst/>
+          </a:prstGeom>
+        </p:spPr>
+        <p:txBody>
+          <a:bodyPr xmlns:a="http://schemas.openxmlformats.org/drawingml/2006/main"/>
+          <a:lstStyle xmlns:a="http://schemas.openxmlformats.org/drawingml/2006/main"/>
+          <a:p xmlns:a="http://schemas.openxmlformats.org/drawingml/2006/main">
+            <a:r>
+              <a:rPr lang="en-US" sz="4000"/>
+              <a:t>M2: background, notes &amp; image</a:t>
+            </a:r>
+          </a:p>
+        </p:txBody>
+      </p:sp>
+      <p:pic>
+        <p:nvPicPr>
+          <p:cNvPr id="3" name="showcase-logo.png"/>
+          <p:cNvPicPr>
+            <a:picLocks xmlns:a="http://schemas.openxmlformats.org/drawingml/2006/main" noChangeAspect="1"/>
+          </p:cNvPicPr>
+          <p:nvPr/>
+        </p:nvPicPr>
+        <p:blipFill>
+          <a:blip xmlns:r="http://schemas.openxmlformats.org/officeDocument/2006/relationships" xmlns:a="http://schemas.openxmlformats.org/drawingml/2006/main" r:embed="Re4ec60701c374dc6"/>
+          <a:stretch xmlns:a="http://schemas.openxmlformats.org/drawingml/2006/main">
+            <a:fillRect/>
+          </a:stretch>
+        </p:blipFill>
+        <p:spPr>
+          <a:xfrm xmlns:a="http://schemas.openxmlformats.org/drawingml/2006/main">
+            <a:off x="720000" y="2160000"/>
+            <a:ext cx="2160000" cy="1080000"/>
+          </a:xfrm>
+          <a:prstGeom xmlns:a="http://schemas.openxmlformats.org/drawingml/2006/main" prst="rect">
+            <a:avLst/>
+          </a:prstGeom>
+        </p:spPr>
+      </p:pic>
+    </p:spTree>
+  </p:cSld>
+  <p:clrMapOvr>
+    <a:masterClrMapping xmlns:a="http://schemas.openxmlformats.org/drawingml/2006/main"/>
+  </p:clrMapOvr>
+</p:sld>
 </file>
--- a/fixtures/manual-check/pptx-showcase.pptx
+++ b/fixtures/manual-check/pptx-showcase.pptx
@@ -5,12 +5,13 @@
     <p:sldMasterId xmlns:r="http://schemas.openxmlformats.org/officeDocument/2006/relationships" id="2147483648" r:id="rId1"/>
   </p:sldMasterIdLst>
   <p:notesMasterIdLst>
-    <p:notesMasterId r:id="R4c0ee55e69c74b69"/>
+    <p:notesMasterId r:id="Rbd27886b20324da2"/>
   </p:notesMasterIdLst>
   <p:sldIdLst>
     <p:sldId xmlns:r="http://schemas.openxmlformats.org/officeDocument/2006/relationships" id="256" r:id="rId2"/>
-    <p:sldId id="257" r:id="R21b073197730402e"/>
-    <p:sldId id="258" r:id="Raaacc6aa23c9451a"/>
+    <p:sldId id="257" r:id="Rb8a13454b2c345bb"/>
+    <p:sldId id="258" r:id="R7b6dbcaf593d4f2e"/>
+    <p:sldId id="259" r:id="R00634d1ce4dd4c7e"/>
   </p:sldIdLst>
   <p:sldSz cx="12192000" cy="6858000"/>
   <p:notesSz cx="6858000" cy="9144000"/>
@@ -338,6 +339,141 @@
 </a:theme>
 </file>
 
+<file path=ppt/slides/charts/chart1.xml><?xml version="1.0" encoding="utf-8"?>
+<c:chartSpace xmlns:c="http://schemas.openxmlformats.org/drawingml/2006/chart" xmlns:a="http://schemas.openxmlformats.org/drawingml/2006/main" xmlns:r="http://schemas.openxmlformats.org/officeDocument/2006/relationships">
+  <c:chart>
+    <c:title>
+      <c:tx>
+        <c:rich>
+          <a:bodyPr/>
+          <a:lstStyle/>
+          <a:p>
+            <a:r>
+              <a:t>Quarterly revenue</a:t>
+            </a:r>
+          </a:p>
+        </c:rich>
+      </c:tx>
+      <c:overlay val="0"/>
+    </c:title>
+    <c:autoTitleDeleted val="0"/>
+    <c:plotArea>
+      <c:layout/>
+      <c:barChart>
+        <c:barDir val="col"/>
+        <c:grouping val="clustered"/>
+        <c:varyColors val="0"/>
+        <c:ser>
+          <c:idx val="0"/>
+          <c:order val="0"/>
+          <c:tx>
+            <c:v>2025</c:v>
+          </c:tx>
+          <c:cat>
+            <c:strLit>
+              <c:ptCount val="4"/>
+              <c:pt idx="0">
+                <c:v>Q1</c:v>
+              </c:pt>
+              <c:pt idx="1">
+                <c:v>Q2</c:v>
+              </c:pt>
+              <c:pt idx="2">
+                <c:v>Q3</c:v>
+              </c:pt>
+              <c:pt idx="3">
+                <c:v>Q4</c:v>
+              </c:pt>
+            </c:strLit>
+          </c:cat>
+          <c:val>
+            <c:numLit>
+              <c:formatCode>General</c:formatCode>
+              <c:ptCount val="4"/>
+              <c:pt idx="0">
+                <c:v>12</c:v>
+              </c:pt>
+              <c:pt idx="1">
+                <c:v>18</c:v>
+              </c:pt>
+              <c:pt idx="2">
+                <c:v>15</c:v>
+              </c:pt>
+              <c:pt idx="3">
+                <c:v>22</c:v>
+              </c:pt>
+            </c:numLit>
+          </c:val>
+        </c:ser>
+        <c:ser>
+          <c:idx val="1"/>
+          <c:order val="1"/>
+          <c:tx>
+            <c:v>2026</c:v>
+          </c:tx>
+          <c:cat>
+            <c:strLit>
+              <c:ptCount val="4"/>
+              <c:pt idx="0">
+                <c:v>Q1</c:v>
+              </c:pt>
+              <c:pt idx="1">
+                <c:v>Q2</c:v>
+              </c:pt>
+              <c:pt idx="2">
+                <c:v>Q3</c:v>
+              </c:pt>
+              <c:pt idx="3">
+                <c:v>Q4</c:v>
+              </c:pt>
+            </c:strLit>
+          </c:cat>
+          <c:val>
+            <c:numLit>
+              <c:formatCode>General</c:formatCode>
+              <c:ptCount val="4"/>
+              <c:pt idx="0">
+                <c:v>14</c:v>
+              </c:pt>
+              <c:pt idx="1">
+                <c:v>21</c:v>
+              </c:pt>
+              <c:pt idx="2">
+                <c:v>19</c:v>
+              </c:pt>
+              <c:pt idx="3">
+                <c:v>27</c:v>
+              </c:pt>
+            </c:numLit>
+          </c:val>
+        </c:ser>
+        <c:axId val="100001"/>
+        <c:axId val="100002"/>
+      </c:barChart>
+      <c:catAx>
+        <c:axId val="100001"/>
+        <c:scaling>
+          <c:orientation val="minMax"/>
+        </c:scaling>
+        <c:delete val="0"/>
+        <c:axPos val="b"/>
+        <c:crossAx val="100002"/>
+      </c:catAx>
+      <c:valAx>
+        <c:axId val="100002"/>
+        <c:scaling>
+          <c:orientation val="minMax"/>
+        </c:scaling>
+        <c:delete val="0"/>
+        <c:axPos val="l"/>
+        <c:crossAx val="100001"/>
+      </c:valAx>
+    </c:plotArea>
+    <c:plotVisOnly val="1"/>
+  </c:chart>
+</c:chartSpace>
+</file>
+
 <file path=ppt/slides/slide1.xml><?xml version="1.0" encoding="utf-8"?>
 <p:sld xmlns:p="http://schemas.openxmlformats.org/presentationml/2006/main">
   <p:cSld>
@@ -564,7 +700,7 @@
           <p:nvPr/>
         </p:nvPicPr>
         <p:blipFill>
-          <a:blip xmlns:r="http://schemas.openxmlformats.org/officeDocument/2006/relationships" xmlns:a="http://schemas.openxmlformats.org/drawingml/2006/main" r:embed="Re4ec60701c374dc6"/>
+          <a:blip xmlns:r="http://schemas.openxmlformats.org/officeDocument/2006/relationships" xmlns:a="http://schemas.openxmlformats.org/drawingml/2006/main" r:embed="R8c0c5f58697e486c"/>
           <a:stretch xmlns:a="http://schemas.openxmlformats.org/drawingml/2006/main">
             <a:fillRect/>
           </a:stretch>
@@ -585,4 +721,153 @@
     <a:masterClrMapping xmlns:a="http://schemas.openxmlformats.org/drawingml/2006/main"/>
   </p:clrMapOvr>
 </p:sld>
+</file>
+
+<file path=ppt/slides/slide4.xml><?xml version="1.0" encoding="utf-8"?>
+<p:sld xmlns:p="http://schemas.openxmlformats.org/presentationml/2006/main">
+  <p:cSld>
+    <p:spTree>
+      <p:nvGrpSpPr>
+        <p:cNvPr id="1" name=""/>
+        <p:cNvGrpSpPr/>
+        <p:nvPr/>
+      </p:nvGrpSpPr>
+      <p:grpSpPr>
+        <a:xfrm xmlns:a="http://schemas.openxmlformats.org/drawingml/2006/main"/>
+      </p:grpSpPr>
+      <p:sp>
+        <p:nvSpPr>
+          <p:cNvPr id="2" name="Title"/>
+          <p:cNvSpPr>
+            <a:spLocks xmlns:a="http://schemas.openxmlformats.org/drawingml/2006/main" noGrp="1"/>
+          </p:cNvSpPr>
+          <p:nvPr>
+            <p:ph type="title"/>
+          </p:nvPr>
+        </p:nvSpPr>
+        <p:spPr>
+          <a:xfrm xmlns:a="http://schemas.openxmlformats.org/drawingml/2006/main">
+            <a:off x="831850" y="365125"/>
+            <a:ext cx="10515600" cy="1325563"/>
+          </a:xfrm>
+          <a:prstGeom xmlns:a="http://schemas.openxmlformats.org/drawingml/2006/main" prst="rect">
+            <a:avLst/>
+          </a:prstGeom>
+        </p:spPr>
+        <p:txBody>
+          <a:bodyPr xmlns:a="http://schemas.openxmlformats.org/drawingml/2006/main"/>
+          <a:lstStyle xmlns:a="http://schemas.openxmlformats.org/drawingml/2006/main"/>
+          <a:p xmlns:a="http://schemas.openxmlformats.org/drawingml/2006/main">
+            <a:r>
+              <a:rPr lang="en-US" sz="4000"/>
+              <a:t>M3: chart, geometries &amp; transition</a:t>
+            </a:r>
+          </a:p>
+        </p:txBody>
+      </p:sp>
+      <p:graphicFrame>
+        <p:nvGraphicFramePr>
+          <p:cNvPr id="3" name="Chart 3"/>
+          <p:cNvGraphicFramePr/>
+          <p:nvPr/>
+        </p:nvGraphicFramePr>
+        <p:xfrm>
+          <a:off xmlns:a="http://schemas.openxmlformats.org/drawingml/2006/main" x="720000" y="1620000"/>
+          <a:ext xmlns:a="http://schemas.openxmlformats.org/drawingml/2006/main" cx="5760000" cy="3960000"/>
+        </p:xfrm>
+        <a:graphic xmlns:a="http://schemas.openxmlformats.org/drawingml/2006/main">
+          <a:graphicData uri="http://schemas.openxmlformats.org/drawingml/2006/chart">
+            <c:chart xmlns:r="http://schemas.openxmlformats.org/officeDocument/2006/relationships" xmlns:c="http://schemas.openxmlformats.org/drawingml/2006/chart" r:id="R0de37f929da940d6"/>
+          </a:graphicData>
+        </a:graphic>
+      </p:graphicFrame>
+      <p:sp>
+        <p:nvSpPr>
+          <p:cNvPr id="4" name="Ellipse 4"/>
+          <p:cNvSpPr/>
+          <p:nvPr/>
+        </p:nvSpPr>
+        <p:spPr>
+          <a:xfrm xmlns:a="http://schemas.openxmlformats.org/drawingml/2006/main">
+            <a:off x="7200000" y="1620000"/>
+            <a:ext cx="1800000" cy="1080000"/>
+          </a:xfrm>
+          <a:prstGeom xmlns:a="http://schemas.openxmlformats.org/drawingml/2006/main" prst="ellipse">
+            <a:avLst/>
+          </a:prstGeom>
+          <a:solidFill xmlns:a="http://schemas.openxmlformats.org/drawingml/2006/main">
+            <a:srgbClr val="70AD47"/>
+          </a:solidFill>
+        </p:spPr>
+        <p:txBody>
+          <a:bodyPr xmlns:a="http://schemas.openxmlformats.org/drawingml/2006/main" wrap="square"/>
+          <a:lstStyle xmlns:a="http://schemas.openxmlformats.org/drawingml/2006/main"/>
+          <a:p xmlns:a="http://schemas.openxmlformats.org/drawingml/2006/main">
+            <a:pPr algn="ctr"/>
+            <a:r>
+              <a:rPr lang="en-US"/>
+              <a:t>ellipse</a:t>
+            </a:r>
+          </a:p>
+        </p:txBody>
+      </p:sp>
+      <p:sp>
+        <p:nvSpPr>
+          <p:cNvPr id="5" name="Arrow 5"/>
+          <p:cNvSpPr/>
+          <p:nvPr/>
+        </p:nvSpPr>
+        <p:spPr>
+          <a:xfrm xmlns:a="http://schemas.openxmlformats.org/drawingml/2006/main">
+            <a:off x="9360000" y="1620000"/>
+            <a:ext cx="1800000" cy="1080000"/>
+          </a:xfrm>
+          <a:prstGeom xmlns:a="http://schemas.openxmlformats.org/drawingml/2006/main" prst="rightArrow">
+            <a:avLst/>
+          </a:prstGeom>
+          <a:solidFill xmlns:a="http://schemas.openxmlformats.org/drawingml/2006/main">
+            <a:srgbClr val="ED7D31"/>
+          </a:solidFill>
+        </p:spPr>
+        <p:txBody>
+          <a:bodyPr xmlns:a="http://schemas.openxmlformats.org/drawingml/2006/main" wrap="square"/>
+          <a:lstStyle xmlns:a="http://schemas.openxmlformats.org/drawingml/2006/main"/>
+          <a:p xmlns:a="http://schemas.openxmlformats.org/drawingml/2006/main">
+            <a:r>
+              <a:rPr lang="en-US"/>
+              <a:t/>
+            </a:r>
+          </a:p>
+        </p:txBody>
+      </p:sp>
+      <p:cxnSp>
+        <p:nvCxnSpPr>
+          <p:cNvPr id="6" name="Line 6"/>
+          <p:cNvCxnSpPr/>
+          <p:nvPr/>
+        </p:nvCxnSpPr>
+        <p:spPr>
+          <a:xfrm xmlns:a="http://schemas.openxmlformats.org/drawingml/2006/main" flipV="1">
+            <a:off x="7200000" y="3240000"/>
+            <a:ext cx="3960000" cy="1080000"/>
+          </a:xfrm>
+          <a:prstGeom xmlns:a="http://schemas.openxmlformats.org/drawingml/2006/main" prst="line">
+            <a:avLst/>
+          </a:prstGeom>
+          <a:ln xmlns:a="http://schemas.openxmlformats.org/drawingml/2006/main" w="19050">
+            <a:solidFill>
+              <a:srgbClr val="4472C4"/>
+            </a:solidFill>
+          </a:ln>
+        </p:spPr>
+      </p:cxnSp>
+    </p:spTree>
+  </p:cSld>
+  <p:clrMapOvr>
+    <a:masterClrMapping xmlns:a="http://schemas.openxmlformats.org/drawingml/2006/main"/>
+  </p:clrMapOvr>
+  <p:transition xmlns:p14="http://schemas.microsoft.com/office/powerpoint/2010/main" p14:dur="700">
+    <p:fade/>
+  </p:transition>
+</p:sld>
 </file>
--- a/fixtures/manual-check/pptx-showcase.pptx
+++ b/fixtures/manual-check/pptx-showcase.pptx
@@ -5,18 +5,34 @@
     <p:sldMasterId xmlns:r="http://schemas.openxmlformats.org/officeDocument/2006/relationships" id="2147483648" r:id="rId1"/>
   </p:sldMasterIdLst>
   <p:notesMasterIdLst>
-    <p:notesMasterId r:id="Rbd27886b20324da2"/>
+    <p:notesMasterId r:id="R43503c7e5f67499a"/>
   </p:notesMasterIdLst>
   <p:sldIdLst>
     <p:sldId xmlns:r="http://schemas.openxmlformats.org/officeDocument/2006/relationships" id="256" r:id="rId2"/>
-    <p:sldId id="257" r:id="Rb8a13454b2c345bb"/>
-    <p:sldId id="258" r:id="R7b6dbcaf593d4f2e"/>
-    <p:sldId id="259" r:id="R00634d1ce4dd4c7e"/>
+    <p:sldId id="257" r:id="R035defabd58e4b10"/>
+    <p:sldId id="258" r:id="R060137ce59284f04"/>
+    <p:sldId id="259" r:id="R3fb08e3be6d045b0"/>
+    <p:sldId id="260" r:id="R400595cedd0f4c93"/>
   </p:sldIdLst>
   <p:sldSz cx="12192000" cy="6858000"/>
   <p:notesSz cx="6858000" cy="9144000"/>
   <p:defaultTextStyle/>
 </p:presentation>
+</file>
+
+<file path=ppt/commentAuthors.xml><?xml version="1.0" encoding="utf-8"?>
+<p:cmAuthorLst xmlns:p="http://schemas.openxmlformats.org/presentationml/2006/main">
+  <p:cmAuthor id="0" name="AIOffice" initials="A" lastIdx="1" clrIdx="0"/>
+</p:cmAuthorLst>
+</file>
+
+<file path=ppt/comments/comment1.xml><?xml version="1.0" encoding="utf-8"?>
+<p:cmLst xmlns:p="http://schemas.openxmlformats.org/presentationml/2006/main">
+  <p:cm authorId="0" dt="2026-06-12T14:17:08.140097Z" idx="1">
+    <p:pos x="0" y="0"/>
+    <p:text>Added by aioffice M4 — check the comments pane.</p:text>
+  </p:cm>
+</p:cmLst>
 </file>
 
 <file path=ppt/notesMasters/notesMaster1.xml><?xml version="1.0" encoding="utf-8"?>
@@ -367,84 +383,112 @@
           <c:idx val="0"/>
           <c:order val="0"/>
           <c:tx>
-            <c:v>2025</c:v>
+            <c:strRef>
+              <c:f>Sheet1!$B$1</c:f>
+              <c:strCache>
+                <c:ptCount val="1"/>
+                <c:pt idx="0">
+                  <c:v>2025</c:v>
+                </c:pt>
+              </c:strCache>
+            </c:strRef>
           </c:tx>
           <c:cat>
-            <c:strLit>
-              <c:ptCount val="4"/>
-              <c:pt idx="0">
-                <c:v>Q1</c:v>
-              </c:pt>
-              <c:pt idx="1">
-                <c:v>Q2</c:v>
-              </c:pt>
-              <c:pt idx="2">
-                <c:v>Q3</c:v>
-              </c:pt>
-              <c:pt idx="3">
-                <c:v>Q4</c:v>
-              </c:pt>
-            </c:strLit>
+            <c:strRef>
+              <c:f>Sheet1!$A$2:$A$5</c:f>
+              <c:strCache>
+                <c:ptCount val="4"/>
+                <c:pt idx="0">
+                  <c:v>Q1</c:v>
+                </c:pt>
+                <c:pt idx="1">
+                  <c:v>Q2</c:v>
+                </c:pt>
+                <c:pt idx="2">
+                  <c:v>Q3</c:v>
+                </c:pt>
+                <c:pt idx="3">
+                  <c:v>Q4</c:v>
+                </c:pt>
+              </c:strCache>
+            </c:strRef>
           </c:cat>
           <c:val>
-            <c:numLit>
-              <c:formatCode>General</c:formatCode>
-              <c:ptCount val="4"/>
-              <c:pt idx="0">
-                <c:v>12</c:v>
-              </c:pt>
-              <c:pt idx="1">
-                <c:v>18</c:v>
-              </c:pt>
-              <c:pt idx="2">
-                <c:v>15</c:v>
-              </c:pt>
-              <c:pt idx="3">
-                <c:v>22</c:v>
-              </c:pt>
-            </c:numLit>
+            <c:numRef>
+              <c:f>Sheet1!$B$2:$B$5</c:f>
+              <c:numCache>
+                <c:formatCode>General</c:formatCode>
+                <c:ptCount val="4"/>
+                <c:pt idx="0">
+                  <c:v>12</c:v>
+                </c:pt>
+                <c:pt idx="1">
+                  <c:v>18</c:v>
+                </c:pt>
+                <c:pt idx="2">
+                  <c:v>15</c:v>
+                </c:pt>
+                <c:pt idx="3">
+                  <c:v>22</c:v>
+                </c:pt>
+              </c:numCache>
+            </c:numRef>
           </c:val>
         </c:ser>
         <c:ser>
           <c:idx val="1"/>
           <c:order val="1"/>
           <c:tx>
-            <c:v>2026</c:v>
+            <c:strRef>
+              <c:f>Sheet1!$C$1</c:f>
+              <c:strCache>
+                <c:ptCount val="1"/>
+                <c:pt idx="0">
+                  <c:v>2026</c:v>
+                </c:pt>
+              </c:strCache>
+            </c:strRef>
           </c:tx>
           <c:cat>
-            <c:strLit>
-              <c:ptCount val="4"/>
-              <c:pt idx="0">
-                <c:v>Q1</c:v>
-              </c:pt>
-              <c:pt idx="1">
-                <c:v>Q2</c:v>
-              </c:pt>
-              <c:pt idx="2">
-                <c:v>Q3</c:v>
-              </c:pt>
-              <c:pt idx="3">
-                <c:v>Q4</c:v>
-              </c:pt>
-            </c:strLit>
+            <c:strRef>
+              <c:f>Sheet1!$A$2:$A$5</c:f>
+              <c:strCache>
+                <c:ptCount val="4"/>
+                <c:pt idx="0">
+                  <c:v>Q1</c:v>
+                </c:pt>
+                <c:pt idx="1">
+                  <c:v>Q2</c:v>
+                </c:pt>
+                <c:pt idx="2">
+                  <c:v>Q3</c:v>
+                </c:pt>
+                <c:pt idx="3">
+                  <c:v>Q4</c:v>
+                </c:pt>
+              </c:strCache>
+            </c:strRef>
           </c:cat>
           <c:val>
-            <c:numLit>
-              <c:formatCode>General</c:formatCode>
-              <c:ptCount val="4"/>
-              <c:pt idx="0">
-                <c:v>14</c:v>
-              </c:pt>
-              <c:pt idx="1">
-                <c:v>21</c:v>
-              </c:pt>
-              <c:pt idx="2">
-                <c:v>19</c:v>
-              </c:pt>
-              <c:pt idx="3">
-                <c:v>27</c:v>
-              </c:pt>
-            </c:numLit>
+            <c:numRef>
+              <c:f>Sheet1!$C$2:$C$5</c:f>
+              <c:numCache>
+                <c:formatCode>General</c:formatCode>
+                <c:ptCount val="4"/>
+                <c:pt idx="0">
+                  <c:v>14</c:v>
+                </c:pt>
+                <c:pt idx="1">
+                  <c:v>21</c:v>
+                </c:pt>
+                <c:pt idx="2">
+                  <c:v>19</c:v>
+                </c:pt>
+                <c:pt idx="3">
+                  <c:v>27</c:v>
+                </c:pt>
+              </c:numCache>
+            </c:numRef>
           </c:val>
         </c:ser>
         <c:axId val="100001"/>
@@ -471,6 +515,9 @@
     </c:plotArea>
     <c:plotVisOnly val="1"/>
   </c:chart>
+  <c:externalData r:id="Rd7b26c9a8f8f40f1">
+    <c:autoUpdate val="0"/>
+  </c:externalData>
 </c:chartSpace>
 </file>
 
@@ -700,7 +747,7 @@
           <p:nvPr/>
         </p:nvPicPr>
         <p:blipFill>
-          <a:blip xmlns:r="http://schemas.openxmlformats.org/officeDocument/2006/relationships" xmlns:a="http://schemas.openxmlformats.org/drawingml/2006/main" r:embed="R8c0c5f58697e486c"/>
+          <a:blip xmlns:r="http://schemas.openxmlformats.org/officeDocument/2006/relationships" xmlns:a="http://schemas.openxmlformats.org/drawingml/2006/main" r:embed="Rc126fa7d63274214"/>
           <a:stretch xmlns:a="http://schemas.openxmlformats.org/drawingml/2006/main">
             <a:fillRect/>
           </a:stretch>
@@ -777,7 +824,7 @@
         </p:xfrm>
         <a:graphic xmlns:a="http://schemas.openxmlformats.org/drawingml/2006/main">
           <a:graphicData uri="http://schemas.openxmlformats.org/drawingml/2006/chart">
-            <c:chart xmlns:r="http://schemas.openxmlformats.org/officeDocument/2006/relationships" xmlns:c="http://schemas.openxmlformats.org/drawingml/2006/chart" r:id="R0de37f929da940d6"/>
+            <c:chart xmlns:r="http://schemas.openxmlformats.org/officeDocument/2006/relationships" xmlns:c="http://schemas.openxmlformats.org/drawingml/2006/chart" r:id="Rbfce44c1ad9749e3"/>
           </a:graphicData>
         </a:graphic>
       </p:graphicFrame>
@@ -870,4 +917,170 @@
     <p:fade/>
   </p:transition>
 </p:sld>
+</file>
+
+<file path=ppt/slides/slide5.xml><?xml version="1.0" encoding="utf-8"?>
+<p:sld xmlns:a="http://schemas.openxmlformats.org/drawingml/2006/main" xmlns:p="http://schemas.openxmlformats.org/presentationml/2006/main">
+  <p:cSld>
+    <p:spTree>
+      <p:nvGrpSpPr>
+        <p:cNvPr id="1" name=""/>
+        <p:cNvGrpSpPr/>
+        <p:nvPr/>
+      </p:nvGrpSpPr>
+      <p:grpSpPr>
+        <a:xfrm xmlns:a="http://schemas.openxmlformats.org/drawingml/2006/main"/>
+      </p:grpSpPr>
+      <p:sp>
+        <p:nvSpPr>
+          <p:cNvPr id="2" name="Title"/>
+          <p:cNvSpPr>
+            <a:spLocks xmlns:a="http://schemas.openxmlformats.org/drawingml/2006/main" noGrp="1"/>
+          </p:cNvSpPr>
+          <p:nvPr>
+            <p:ph type="title"/>
+          </p:nvPr>
+        </p:nvSpPr>
+        <p:spPr>
+          <a:xfrm xmlns:a="http://schemas.openxmlformats.org/drawingml/2006/main">
+            <a:off x="831850" y="365125"/>
+            <a:ext cx="10515600" cy="1325563"/>
+          </a:xfrm>
+          <a:prstGeom xmlns:a="http://schemas.openxmlformats.org/drawingml/2006/main" prst="rect">
+            <a:avLst/>
+          </a:prstGeom>
+        </p:spPr>
+        <p:txBody>
+          <a:bodyPr xmlns:a="http://schemas.openxmlformats.org/drawingml/2006/main"/>
+          <a:lstStyle xmlns:a="http://schemas.openxmlformats.org/drawingml/2006/main"/>
+          <a:p xmlns:a="http://schemas.openxmlformats.org/drawingml/2006/main">
+            <a:r>
+              <a:rPr lang="en-US" sz="4000"/>
+              <a:t>M4: animations, comments &amp; replace</a:t>
+            </a:r>
+          </a:p>
+        </p:txBody>
+      </p:sp>
+      <p:sp>
+        <p:nvSpPr>
+          <p:cNvPr id="3" name="TextBox 3"/>
+          <p:cNvSpPr txBox="1"/>
+          <p:nvPr/>
+        </p:nvSpPr>
+        <p:spPr>
+          <a:xfrm xmlns:a="http://schemas.openxmlformats.org/drawingml/2006/main">
+            <a:off x="1440000" y="2160000"/>
+            <a:ext cx="4320000" cy="1440000"/>
+          </a:xfrm>
+          <a:prstGeom xmlns:a="http://schemas.openxmlformats.org/drawingml/2006/main" prst="rect">
+            <a:avLst/>
+          </a:prstGeom>
+          <a:solidFill xmlns:a="http://schemas.openxmlformats.org/drawingml/2006/main">
+            <a:srgbClr val="DCE6F2"/>
+          </a:solidFill>
+        </p:spPr>
+        <p:txBody>
+          <a:bodyPr xmlns:a="http://schemas.openxmlformats.org/drawingml/2006/main" wrap="square"/>
+          <a:lstStyle xmlns:a="http://schemas.openxmlformats.org/drawingml/2006/main"/>
+          <a:p xmlns:a="http://schemas.openxmlformats.org/drawingml/2006/main">
+            <a:r>
+              <a:rPr lang="en-US"/>
+              <a:t>This box fades in on click </a:t>
+            </a:r>
+            <a:r>
+              <a:rPr lang="en-US"/>
+              <a:t>(replaced by aioffice)</a:t>
+            </a:r>
+          </a:p>
+        </p:txBody>
+      </p:sp>
+    </p:spTree>
+  </p:cSld>
+  <p:clrMapOvr>
+    <a:masterClrMapping xmlns:a="http://schemas.openxmlformats.org/drawingml/2006/main"/>
+  </p:clrMapOvr>
+  <p:timing>
+    <p:tnLst>
+      <p:par>
+        <p:cTn id="1" dur="indefinite" restart="never" nodeType="tmRoot">
+          <p:childTnLst>
+            <p:seq concurrent="1" nextAc="seek">
+              <p:cTn id="2" dur="indefinite" nodeType="mainSeq">
+                <p:childTnLst>
+                  <p:par>
+                    <p:cTn id="3" fill="hold">
+                      <p:stCondLst>
+                        <p:cond delay="indefinite"/>
+                      </p:stCondLst>
+                      <p:childTnLst>
+                        <p:par>
+                          <p:cTn id="4" fill="hold">
+                            <p:stCondLst>
+                              <p:cond delay="0"/>
+                            </p:stCondLst>
+                            <p:childTnLst>
+                              <p:par>
+                                <p:cTn id="7" presetID="10" presetClass="entr" presetSubtype="0" fill="hold" grpId="0" nodeType="clickEffect">
+                                  <p:stCondLst>
+                                    <p:cond delay="0"/>
+                                  </p:stCondLst>
+                                  <p:childTnLst>
+                                    <p:set>
+                                      <p:cBhvr>
+                                        <p:cTn id="5" dur="1" fill="hold">
+                                          <p:stCondLst>
+                                            <p:cond delay="0"/>
+                                          </p:stCondLst>
+                                        </p:cTn>
+                                        <p:tgtEl>
+                                          <p:spTgt spid="3"/>
+                                        </p:tgtEl>
+                                        <p:attrNameLst>
+                                          <p:attrName>style.visibility</p:attrName>
+                                        </p:attrNameLst>
+                                      </p:cBhvr>
+                                      <p:to>
+                                        <p:strVal val="visible"/>
+                                      </p:to>
+                                    </p:set>
+                                    <p:animEffect transition="in" filter="fade">
+                                      <p:cBhvr>
+                                        <p:cTn id="6" dur="500"/>
+                                        <p:tgtEl>
+                                          <p:spTgt spid="3"/>
+                                        </p:tgtEl>
+                                      </p:cBhvr>
+                                    </p:animEffect>
+                                  </p:childTnLst>
+                                </p:cTn>
+                              </p:par>
+                            </p:childTnLst>
+                          </p:cTn>
+                        </p:par>
+                      </p:childTnLst>
+                    </p:cTn>
+                  </p:par>
+                </p:childTnLst>
+              </p:cTn>
+              <p:prevCondLst>
+                <p:cond evt="onPrev" delay="0">
+                  <p:tgtEl>
+                    <p:sldTgt/>
+                  </p:tgtEl>
+                </p:cond>
+              </p:prevCondLst>
+              <p:nextCondLst>
+                <p:cond evt="onNext" delay="0">
+                  <p:tgtEl>
+                    <p:sldTgt/>
+                  </p:tgtEl>
+                </p:cond>
+              </p:nextCondLst>
+            </p:seq>
+          </p:childTnLst>
+        </p:cTn>
+      </p:par>
+    </p:tnLst>
+  </p:timing>
+</p:sld>
 </file>
--- a/fixtures/manual-check/pptx-showcase.pptx
+++ b/fixtures/manual-check/pptx-showcase.pptx
@@ -5,14 +5,15 @@
     <p:sldMasterId xmlns:r="http://schemas.openxmlformats.org/officeDocument/2006/relationships" id="2147483648" r:id="rId1"/>
   </p:sldMasterIdLst>
   <p:notesMasterIdLst>
-    <p:notesMasterId r:id="R43503c7e5f67499a"/>
+    <p:notesMasterId r:id="R056317649cb24bd6"/>
   </p:notesMasterIdLst>
   <p:sldIdLst>
     <p:sldId xmlns:r="http://schemas.openxmlformats.org/officeDocument/2006/relationships" id="256" r:id="rId2"/>
-    <p:sldId id="257" r:id="R035defabd58e4b10"/>
-    <p:sldId id="258" r:id="R060137ce59284f04"/>
-    <p:sldId id="259" r:id="R3fb08e3be6d045b0"/>
-    <p:sldId id="260" r:id="R400595cedd0f4c93"/>
+    <p:sldId id="257" r:id="Rd826cc36146649ff"/>
+    <p:sldId id="258" r:id="R754eddda63404d68"/>
+    <p:sldId id="259" r:id="R74cdbeb1f3764fc1"/>
+    <p:sldId id="260" r:id="Rc083c651b2824d53"/>
+    <p:sldId id="261" r:id="Red40da6d984148c0"/>
   </p:sldIdLst>
   <p:sldSz cx="12192000" cy="6858000"/>
   <p:notesSz cx="6858000" cy="9144000"/>
@@ -22,15 +23,36 @@
 
 <file path=ppt/commentAuthors.xml><?xml version="1.0" encoding="utf-8"?>
 <p:cmAuthorLst xmlns:p="http://schemas.openxmlformats.org/presentationml/2006/main">
-  <p:cmAuthor id="0" name="AIOffice" initials="A" lastIdx="1" clrIdx="0"/>
+  <p:cmAuthor id="0" name="AIOffice" initials="A" lastIdx="2" clrIdx="0"/>
+  <p:cmAuthor id="1" name="Reviewer" initials="R" lastIdx="3" clrIdx="1"/>
 </p:cmAuthorLst>
 </file>
 
 <file path=ppt/comments/comment1.xml><?xml version="1.0" encoding="utf-8"?>
 <p:cmLst xmlns:p="http://schemas.openxmlformats.org/presentationml/2006/main">
-  <p:cm authorId="0" dt="2026-06-12T14:17:08.140097Z" idx="1">
+  <p:cm authorId="0" dt="2026-06-12T15:54:05.029818Z" idx="1">
     <p:pos x="0" y="0"/>
     <p:text>Added by aioffice M4 — check the comments pane.</p:text>
+  </p:cm>
+</p:cmLst>
+</file>
+
+<file path=ppt/comments/comment2.xml><?xml version="1.0" encoding="utf-8"?>
+<p:cmLst xmlns:p="http://schemas.openxmlformats.org/presentationml/2006/main">
+  <p:cm authorId="0" dt="2026-06-12T15:54:05.053048Z" idx="2">
+    <p:pos x="0" y="0"/>
+    <p:text>M5 thread root — expand to see the reply.</p:text>
+  </p:cm>
+  <p:cm authorId="1" dt="2026-06-12T15:54:05.074326Z" idx="3">
+    <p:pos x="0" y="0"/>
+    <p:text>Threaded reply added by aioffice M5.</p:text>
+    <p:extLst>
+      <p:ext uri="{C676402C-5697-4E1C-873F-D02D1690AC5C}">
+        <p15:threadingInfo xmlns:p15="http://schemas.microsoft.com/office/powerpoint/2012/main">
+          <p15:parentCm authorId="0" idx="2"/>
+        </p15:threadingInfo>
+      </p:ext>
+    </p:extLst>
   </p:cm>
 </p:cmLst>
 </file>
@@ -515,7 +537,7 @@
     </c:plotArea>
     <c:plotVisOnly val="1"/>
   </c:chart>
-  <c:externalData r:id="Rd7b26c9a8f8f40f1">
+  <c:externalData r:id="R77d925fec88040a0">
     <c:autoUpdate val="0"/>
   </c:externalData>
 </c:chartSpace>
@@ -747,7 +769,7 @@
           <p:nvPr/>
         </p:nvPicPr>
         <p:blipFill>
-          <a:blip xmlns:r="http://schemas.openxmlformats.org/officeDocument/2006/relationships" xmlns:a="http://schemas.openxmlformats.org/drawingml/2006/main" r:embed="Rc126fa7d63274214"/>
+          <a:blip xmlns:r="http://schemas.openxmlformats.org/officeDocument/2006/relationships" xmlns:a="http://schemas.openxmlformats.org/drawingml/2006/main" r:embed="Rb1dd40f64be64ccb"/>
           <a:stretch xmlns:a="http://schemas.openxmlformats.org/drawingml/2006/main">
             <a:fillRect/>
           </a:stretch>
@@ -824,7 +846,7 @@
         </p:xfrm>
         <a:graphic xmlns:a="http://schemas.openxmlformats.org/drawingml/2006/main">
           <a:graphicData uri="http://schemas.openxmlformats.org/drawingml/2006/chart">
-            <c:chart xmlns:r="http://schemas.openxmlformats.org/officeDocument/2006/relationships" xmlns:c="http://schemas.openxmlformats.org/drawingml/2006/chart" r:id="Rbfce44c1ad9749e3"/>
+            <c:chart xmlns:r="http://schemas.openxmlformats.org/officeDocument/2006/relationships" xmlns:c="http://schemas.openxmlformats.org/drawingml/2006/chart" r:id="Rc8bc80df29214a73"/>
           </a:graphicData>
         </a:graphic>
       </p:graphicFrame>
@@ -1083,4 +1105,825 @@
     </p:tnLst>
   </p:timing>
 </p:sld>
+</file>
+
+<file path=ppt/slides/slide6.xml><?xml version="1.0" encoding="utf-8"?>
+<p:sld xmlns:a="http://schemas.openxmlformats.org/drawingml/2006/main" xmlns:p="http://schemas.openxmlformats.org/presentationml/2006/main">
+  <p:cSld>
+    <p:spTree>
+      <p:nvGrpSpPr>
+        <p:cNvPr id="1" name=""/>
+        <p:cNvGrpSpPr/>
+        <p:nvPr/>
+      </p:nvGrpSpPr>
+      <p:grpSpPr>
+        <a:xfrm xmlns:a="http://schemas.openxmlformats.org/drawingml/2006/main"/>
+      </p:grpSpPr>
+      <p:sp>
+        <p:nvSpPr>
+          <p:cNvPr id="2" name="Title"/>
+          <p:cNvSpPr>
+            <a:spLocks xmlns:a="http://schemas.openxmlformats.org/drawingml/2006/main" noGrp="1"/>
+          </p:cNvSpPr>
+          <p:nvPr>
+            <p:ph type="title"/>
+          </p:nvPr>
+        </p:nvSpPr>
+        <p:spPr>
+          <a:xfrm xmlns:a="http://schemas.openxmlformats.org/drawingml/2006/main">
+            <a:off x="831850" y="365125"/>
+            <a:ext cx="10515600" cy="1325563"/>
+          </a:xfrm>
+          <a:prstGeom xmlns:a="http://schemas.openxmlformats.org/drawingml/2006/main" prst="rect">
+            <a:avLst/>
+          </a:prstGeom>
+        </p:spPr>
+        <p:txBody>
+          <a:bodyPr xmlns:a="http://schemas.openxmlformats.org/drawingml/2006/main"/>
+          <a:lstStyle xmlns:a="http://schemas.openxmlformats.org/drawingml/2006/main"/>
+          <a:p xmlns:a="http://schemas.openxmlformats.org/drawingml/2006/main">
+            <a:r>
+              <a:rPr lang="en-US" sz="4000"/>
+              <a:t>M5: tables, replies &amp; emphasis/exit</a:t>
+            </a:r>
+          </a:p>
+        </p:txBody>
+      </p:sp>
+      <p:graphicFrame>
+        <p:nvGraphicFramePr>
+          <p:cNvPr id="3" name="Table 3"/>
+          <p:cNvGraphicFramePr/>
+          <p:nvPr/>
+        </p:nvGraphicFramePr>
+        <p:xfrm>
+          <a:off xmlns:a="http://schemas.openxmlformats.org/drawingml/2006/main" x="720000" y="1800000"/>
+          <a:ext xmlns:a="http://schemas.openxmlformats.org/drawingml/2006/main" cx="7200000" cy="1440000"/>
+        </p:xfrm>
+        <a:graphic xmlns:a="http://schemas.openxmlformats.org/drawingml/2006/main">
+          <a:graphicData uri="http://schemas.openxmlformats.org/drawingml/2006/table">
+            <a:tbl>
+              <a:tblPr firstRow="1"/>
+              <a:tblGrid>
+                <a:gridCol w="1800000"/>
+                <a:gridCol w="1800000"/>
+                <a:gridCol w="1800000"/>
+                <a:gridCol w="1800000"/>
+              </a:tblGrid>
+              <a:tr h="360000">
+                <a:tc>
+                  <a:txBody>
+                    <a:bodyPr/>
+                    <a:lstStyle/>
+                    <a:p>
+                      <a:r>
+                        <a:rPr lang="en-US" b="1">
+                          <a:solidFill>
+                            <a:srgbClr val="FFFFFF"/>
+                          </a:solidFill>
+                        </a:rPr>
+                        <a:t>Region</a:t>
+                      </a:r>
+                    </a:p>
+                  </a:txBody>
+                  <a:tcPr>
+                    <a:lnL w="12700">
+                      <a:solidFill>
+                        <a:srgbClr val="8EAADB"/>
+                      </a:solidFill>
+                    </a:lnL>
+                    <a:lnR w="12700">
+                      <a:solidFill>
+                        <a:srgbClr val="8EAADB"/>
+                      </a:solidFill>
+                    </a:lnR>
+                    <a:lnT w="12700">
+                      <a:solidFill>
+                        <a:srgbClr val="8EAADB"/>
+                      </a:solidFill>
+                    </a:lnT>
+                    <a:lnB w="12700">
+                      <a:solidFill>
+                        <a:srgbClr val="8EAADB"/>
+                      </a:solidFill>
+                    </a:lnB>
+                    <a:solidFill>
+                      <a:srgbClr val="4472C4"/>
+                    </a:solidFill>
+                  </a:tcPr>
+                </a:tc>
+                <a:tc>
+                  <a:txBody>
+                    <a:bodyPr/>
+                    <a:lstStyle/>
+                    <a:p>
+                      <a:r>
+                        <a:rPr lang="en-US" b="1">
+                          <a:solidFill>
+                            <a:srgbClr val="FFFFFF"/>
+                          </a:solidFill>
+                        </a:rPr>
+                        <a:t>Q1</a:t>
+                      </a:r>
+                    </a:p>
+                  </a:txBody>
+                  <a:tcPr>
+                    <a:lnL w="12700">
+                      <a:solidFill>
+                        <a:srgbClr val="8EAADB"/>
+                      </a:solidFill>
+                    </a:lnL>
+                    <a:lnR w="12700">
+                      <a:solidFill>
+                        <a:srgbClr val="8EAADB"/>
+                      </a:solidFill>
+                    </a:lnR>
+                    <a:lnT w="12700">
+                      <a:solidFill>
+                        <a:srgbClr val="8EAADB"/>
+                      </a:solidFill>
+                    </a:lnT>
+                    <a:lnB w="12700">
+                      <a:solidFill>
+                        <a:srgbClr val="8EAADB"/>
+                      </a:solidFill>
+                    </a:lnB>
+                    <a:solidFill>
+                      <a:srgbClr val="4472C4"/>
+                    </a:solidFill>
+                  </a:tcPr>
+                </a:tc>
+                <a:tc>
+                  <a:txBody>
+                    <a:bodyPr/>
+                    <a:lstStyle/>
+                    <a:p>
+                      <a:r>
+                        <a:rPr lang="en-US" b="1">
+                          <a:solidFill>
+                            <a:srgbClr val="FFFFFF"/>
+                          </a:solidFill>
+                        </a:rPr>
+                        <a:t>Q2</a:t>
+                      </a:r>
+                    </a:p>
+                  </a:txBody>
+                  <a:tcPr>
+                    <a:lnL w="12700">
+                      <a:solidFill>
+                        <a:srgbClr val="8EAADB"/>
+                      </a:solidFill>
+                    </a:lnL>
+                    <a:lnR w="12700">
+                      <a:solidFill>
+                        <a:srgbClr val="8EAADB"/>
+                      </a:solidFill>
+                    </a:lnR>
+                    <a:lnT w="12700">
+                      <a:solidFill>
+                        <a:srgbClr val="8EAADB"/>
+                      </a:solidFill>
+                    </a:lnT>
+                    <a:lnB w="12700">
+                      <a:solidFill>
+                        <a:srgbClr val="8EAADB"/>
+                      </a:solidFill>
+                    </a:lnB>
+                    <a:solidFill>
+                      <a:srgbClr val="4472C4"/>
+                    </a:solidFill>
+                  </a:tcPr>
+                </a:tc>
+                <a:tc>
+                  <a:txBody>
+                    <a:bodyPr/>
+                    <a:lstStyle/>
+                    <a:p>
+                      <a:r>
+                        <a:rPr lang="en-US" b="1">
+                          <a:solidFill>
+                            <a:srgbClr val="FFFFFF"/>
+                          </a:solidFill>
+                        </a:rPr>
+                        <a:t>Total</a:t>
+                      </a:r>
+                    </a:p>
+                  </a:txBody>
+                  <a:tcPr>
+                    <a:lnL w="12700">
+                      <a:solidFill>
+                        <a:srgbClr val="8EAADB"/>
+                      </a:solidFill>
+                    </a:lnL>
+                    <a:lnR w="12700">
+                      <a:solidFill>
+                        <a:srgbClr val="8EAADB"/>
+                      </a:solidFill>
+                    </a:lnR>
+                    <a:lnT w="12700">
+                      <a:solidFill>
+                        <a:srgbClr val="8EAADB"/>
+                      </a:solidFill>
+                    </a:lnT>
+                    <a:lnB w="12700">
+                      <a:solidFill>
+                        <a:srgbClr val="8EAADB"/>
+                      </a:solidFill>
+                    </a:lnB>
+                    <a:solidFill>
+                      <a:srgbClr val="4472C4"/>
+                    </a:solidFill>
+                  </a:tcPr>
+                </a:tc>
+              </a:tr>
+              <a:tr h="360000">
+                <a:tc rowSpan="2">
+                  <a:txBody>
+                    <a:bodyPr/>
+                    <a:lstStyle/>
+                    <a:p>
+                      <a:r>
+                        <a:rPr lang="en-US"/>
+                        <a:t>EMEA (merged down)</a:t>
+                      </a:r>
+                    </a:p>
+                  </a:txBody>
+                  <a:tcPr>
+                    <a:lnL w="12700">
+                      <a:solidFill>
+                        <a:srgbClr val="8EAADB"/>
+                      </a:solidFill>
+                    </a:lnL>
+                    <a:lnR w="12700">
+                      <a:solidFill>
+                        <a:srgbClr val="8EAADB"/>
+                      </a:solidFill>
+                    </a:lnR>
+                    <a:lnT w="12700">
+                      <a:solidFill>
+                        <a:srgbClr val="8EAADB"/>
+                      </a:solidFill>
+                    </a:lnT>
+                    <a:lnB w="12700">
+                      <a:solidFill>
+                        <a:srgbClr val="8EAADB"/>
+                      </a:solidFill>
+                    </a:lnB>
+                    <a:solidFill>
+                      <a:srgbClr val="D9E2F3"/>
+                    </a:solidFill>
+                  </a:tcPr>
+                </a:tc>
+                <a:tc>
+                  <a:txBody>
+                    <a:bodyPr/>
+                    <a:lstStyle/>
+                    <a:p>
+                      <a:r>
+                        <a:rPr lang="en-US"/>
+                        <a:t/>
+                      </a:r>
+                    </a:p>
+                  </a:txBody>
+                  <a:tcPr>
+                    <a:lnL w="12700">
+                      <a:solidFill>
+                        <a:srgbClr val="8EAADB"/>
+                      </a:solidFill>
+                    </a:lnL>
+                    <a:lnR w="12700">
+                      <a:solidFill>
+                        <a:srgbClr val="8EAADB"/>
+                      </a:solidFill>
+                    </a:lnR>
+                    <a:lnT w="12700">
+                      <a:solidFill>
+                        <a:srgbClr val="8EAADB"/>
+                      </a:solidFill>
+                    </a:lnT>
+                    <a:lnB w="12700">
+                      <a:solidFill>
+                        <a:srgbClr val="8EAADB"/>
+                      </a:solidFill>
+                    </a:lnB>
+                    <a:solidFill>
+                      <a:srgbClr val="D9E2F3"/>
+                    </a:solidFill>
+                  </a:tcPr>
+                </a:tc>
+                <a:tc>
+                  <a:txBody>
+                    <a:bodyPr/>
+                    <a:lstStyle/>
+                    <a:p>
+                      <a:r>
+                        <a:rPr lang="en-US"/>
+                        <a:t/>
+                      </a:r>
+                    </a:p>
+                  </a:txBody>
+                  <a:tcPr>
+                    <a:lnL w="12700">
+                      <a:solidFill>
+                        <a:srgbClr val="8EAADB"/>
+                      </a:solidFill>
+                    </a:lnL>
+                    <a:lnR w="12700">
+                      <a:solidFill>
+                        <a:srgbClr val="8EAADB"/>
+                      </a:solidFill>
+                    </a:lnR>
+                    <a:lnT w="12700">
+                      <a:solidFill>
+                        <a:srgbClr val="8EAADB"/>
+                      </a:solidFill>
+                    </a:lnT>
+                    <a:lnB w="12700">
+                      <a:solidFill>
+                        <a:srgbClr val="8EAADB"/>
+                      </a:solidFill>
+                    </a:lnB>
+                    <a:solidFill>
+                      <a:srgbClr val="D9E2F3"/>
+                    </a:solidFill>
+                  </a:tcPr>
+                </a:tc>
+                <a:tc>
+                  <a:txBody>
+                    <a:bodyPr/>
+                    <a:lstStyle/>
+                    <a:p>
+                      <a:r>
+                        <a:rPr lang="en-US"/>
+                        <a:t/>
+                      </a:r>
+                    </a:p>
+                  </a:txBody>
+                  <a:tcPr>
+                    <a:lnL w="12700">
+                      <a:solidFill>
+                        <a:srgbClr val="8EAADB"/>
+                      </a:solidFill>
+                    </a:lnL>
+                    <a:lnR w="12700">
+                      <a:solidFill>
+                        <a:srgbClr val="8EAADB"/>
+                      </a:solidFill>
+                    </a:lnR>
+                    <a:lnT w="12700">
+                      <a:solidFill>
+                        <a:srgbClr val="8EAADB"/>
+                      </a:solidFill>
+                    </a:lnT>
+                    <a:lnB w="12700">
+                      <a:solidFill>
+                        <a:srgbClr val="8EAADB"/>
+                      </a:solidFill>
+                    </a:lnB>
+                    <a:solidFill>
+                      <a:srgbClr val="D9E2F3"/>
+                    </a:solidFill>
+                  </a:tcPr>
+                </a:tc>
+              </a:tr>
+              <a:tr h="360000">
+                <a:tc vMerge="1">
+                  <a:txBody>
+                    <a:bodyPr/>
+                    <a:lstStyle/>
+                    <a:p>
+                      <a:r>
+                        <a:rPr lang="en-US"/>
+                        <a:t/>
+                      </a:r>
+                    </a:p>
+                  </a:txBody>
+                  <a:tcPr>
+                    <a:lnL w="12700">
+                      <a:solidFill>
+                        <a:srgbClr val="8EAADB"/>
+                      </a:solidFill>
+                    </a:lnL>
+                    <a:lnR w="12700">
+                      <a:solidFill>
+                        <a:srgbClr val="8EAADB"/>
+                      </a:solidFill>
+                    </a:lnR>
+                    <a:lnT w="12700">
+                      <a:solidFill>
+                        <a:srgbClr val="8EAADB"/>
+                      </a:solidFill>
+                    </a:lnT>
+                    <a:lnB w="12700">
+                      <a:solidFill>
+                        <a:srgbClr val="8EAADB"/>
+                      </a:solidFill>
+                    </a:lnB>
+                    <a:solidFill>
+                      <a:srgbClr val="FFFFFF"/>
+                    </a:solidFill>
+                  </a:tcPr>
+                </a:tc>
+                <a:tc>
+                  <a:txBody>
+                    <a:bodyPr/>
+                    <a:lstStyle/>
+                    <a:p>
+                      <a:r>
+                        <a:rPr lang="en-US"/>
+                        <a:t/>
+                      </a:r>
+                    </a:p>
+                  </a:txBody>
+                  <a:tcPr>
+                    <a:lnL w="12700">
+                      <a:solidFill>
+                        <a:srgbClr val="8EAADB"/>
+                      </a:solidFill>
+                    </a:lnL>
+                    <a:lnR w="12700">
+                      <a:solidFill>
+                        <a:srgbClr val="8EAADB"/>
+                      </a:solidFill>
+                    </a:lnR>
+                    <a:lnT w="12700">
+                      <a:solidFill>
+                        <a:srgbClr val="8EAADB"/>
+                      </a:solidFill>
+                    </a:lnT>
+                    <a:lnB w="12700">
+                      <a:solidFill>
+                        <a:srgbClr val="8EAADB"/>
+                      </a:solidFill>
+                    </a:lnB>
+                    <a:solidFill>
+                      <a:srgbClr val="FFFFFF"/>
+                    </a:solidFill>
+                  </a:tcPr>
+                </a:tc>
+                <a:tc>
+                  <a:txBody>
+                    <a:bodyPr/>
+                    <a:lstStyle/>
+                    <a:p>
+                      <a:r>
+                        <a:rPr lang="en-US"/>
+                        <a:t/>
+                      </a:r>
+                    </a:p>
+                  </a:txBody>
+                  <a:tcPr>
+                    <a:lnL w="12700">
+                      <a:solidFill>
+                        <a:srgbClr val="8EAADB"/>
+                      </a:solidFill>
+                    </a:lnL>
+                    <a:lnR w="12700">
+                      <a:solidFill>
+                        <a:srgbClr val="8EAADB"/>
+                      </a:solidFill>
+                    </a:lnR>
+                    <a:lnT w="12700">
+                      <a:solidFill>
+                        <a:srgbClr val="8EAADB"/>
+                      </a:solidFill>
+                    </a:lnT>
+                    <a:lnB w="12700">
+                      <a:solidFill>
+                        <a:srgbClr val="8EAADB"/>
+                      </a:solidFill>
+                    </a:lnB>
+                    <a:solidFill>
+                      <a:srgbClr val="FFFFFF"/>
+                    </a:solidFill>
+                  </a:tcPr>
+                </a:tc>
+                <a:tc>
+                  <a:txBody>
+                    <a:bodyPr/>
+                    <a:lstStyle/>
+                    <a:p>
+                      <a:r>
+                        <a:rPr lang="en-US"/>
+                        <a:t/>
+                      </a:r>
+                    </a:p>
+                  </a:txBody>
+                  <a:tcPr>
+                    <a:lnL w="12700">
+                      <a:solidFill>
+                        <a:srgbClr val="8EAADB"/>
+                      </a:solidFill>
+                    </a:lnL>
+                    <a:lnR w="12700">
+                      <a:solidFill>
+                        <a:srgbClr val="8EAADB"/>
+                      </a:solidFill>
+                    </a:lnR>
+                    <a:lnT w="12700">
+                      <a:solidFill>
+                        <a:srgbClr val="8EAADB"/>
+                      </a:solidFill>
+                    </a:lnT>
+                    <a:lnB w="12700">
+                      <a:solidFill>
+                        <a:srgbClr val="8EAADB"/>
+                      </a:solidFill>
+                    </a:lnB>
+                    <a:solidFill>
+                      <a:srgbClr val="FFFFFF"/>
+                    </a:solidFill>
+                  </a:tcPr>
+                </a:tc>
+              </a:tr>
+              <a:tr h="360000">
+                <a:tc gridSpan="3">
+                  <a:txBody>
+                    <a:bodyPr/>
+                    <a:lstStyle/>
+                    <a:p>
+                      <a:pPr algn="ctr"/>
+                      <a:r>
+                        <a:rPr lang="en-US"/>
+                        <a:t>Grand total (merged right)</a:t>
+                      </a:r>
+                    </a:p>
+                  </a:txBody>
+                  <a:tcPr>
+                    <a:lnL w="12700">
+                      <a:solidFill>
+                        <a:srgbClr val="8EAADB"/>
+                      </a:solidFill>
+                    </a:lnL>
+                    <a:lnR w="12700">
+                      <a:solidFill>
+                        <a:srgbClr val="8EAADB"/>
+                      </a:solidFill>
+                    </a:lnR>
+                    <a:lnT w="12700">
+                      <a:solidFill>
+                        <a:srgbClr val="8EAADB"/>
+                      </a:solidFill>
+                    </a:lnT>
+                    <a:lnB w="12700">
+                      <a:solidFill>
+                        <a:srgbClr val="8EAADB"/>
+                      </a:solidFill>
+                    </a:lnB>
+                    <a:solidFill>
+                      <a:srgbClr val="D9E2F3"/>
+                    </a:solidFill>
+                  </a:tcPr>
+                </a:tc>
+                <a:tc hMerge="1">
+                  <a:txBody>
+                    <a:bodyPr/>
+                    <a:lstStyle/>
+                    <a:p>
+                      <a:r>
+                        <a:rPr lang="en-US"/>
+                        <a:t/>
+                      </a:r>
+                    </a:p>
+                  </a:txBody>
+                  <a:tcPr>
+                    <a:lnL w="12700">
+                      <a:solidFill>
+                        <a:srgbClr val="8EAADB"/>
+                      </a:solidFill>
+                    </a:lnL>
+                    <a:lnR w="12700">
+                      <a:solidFill>
+                        <a:srgbClr val="8EAADB"/>
+                      </a:solidFill>
+                    </a:lnR>
+                    <a:lnT w="12700">
+                      <a:solidFill>
+                        <a:srgbClr val="8EAADB"/>
+                      </a:solidFill>
+                    </a:lnT>
+                    <a:lnB w="12700">
+                      <a:solidFill>
+                        <a:srgbClr val="8EAADB"/>
+                      </a:solidFill>
+                    </a:lnB>
+                    <a:solidFill>
+                      <a:srgbClr val="D9E2F3"/>
+                    </a:solidFill>
+                  </a:tcPr>
+                </a:tc>
+                <a:tc hMerge="1">
+                  <a:txBody>
+                    <a:bodyPr/>
+                    <a:lstStyle/>
+                    <a:p>
+                      <a:r>
+                        <a:rPr lang="en-US"/>
+                        <a:t/>
+                      </a:r>
+                    </a:p>
+                  </a:txBody>
+                  <a:tcPr>
+                    <a:lnL w="12700">
+                      <a:solidFill>
+                        <a:srgbClr val="8EAADB"/>
+                      </a:solidFill>
+                    </a:lnL>
+                    <a:lnR w="12700">
+                      <a:solidFill>
+                        <a:srgbClr val="8EAADB"/>
+                      </a:solidFill>
+                    </a:lnR>
+                    <a:lnT w="12700">
+                      <a:solidFill>
+                        <a:srgbClr val="8EAADB"/>
+                      </a:solidFill>
+                    </a:lnT>
+                    <a:lnB w="12700">
+                      <a:solidFill>
+                        <a:srgbClr val="8EAADB"/>
+                      </a:solidFill>
+                    </a:lnB>
+                    <a:solidFill>
+                      <a:srgbClr val="D9E2F3"/>
+                    </a:solidFill>
+                  </a:tcPr>
+                </a:tc>
+                <a:tc>
+                  <a:txBody>
+                    <a:bodyPr/>
+                    <a:lstStyle/>
+                    <a:p>
+                      <a:r>
+                        <a:rPr lang="en-US"/>
+                        <a:t/>
+                      </a:r>
+                    </a:p>
+                  </a:txBody>
+                  <a:tcPr>
+                    <a:lnL w="12700">
+                      <a:solidFill>
+                        <a:srgbClr val="8EAADB"/>
+                      </a:solidFill>
+                    </a:lnL>
+                    <a:lnR w="12700">
+                      <a:solidFill>
+                        <a:srgbClr val="8EAADB"/>
+                      </a:solidFill>
+                    </a:lnR>
+                    <a:lnT w="12700">
+                      <a:solidFill>
+                        <a:srgbClr val="8EAADB"/>
+                      </a:solidFill>
+                    </a:lnT>
+                    <a:lnB w="12700">
+                      <a:solidFill>
+                        <a:srgbClr val="8EAADB"/>
+                      </a:solidFill>
+                    </a:lnB>
+                    <a:solidFill>
+                      <a:srgbClr val="D9E2F3"/>
+                    </a:solidFill>
+                  </a:tcPr>
+                </a:tc>
+              </a:tr>
+            </a:tbl>
+          </a:graphicData>
+        </a:graphic>
+      </p:graphicFrame>
+      <p:sp>
+        <p:nvSpPr>
+          <p:cNvPr id="4" name="TextBox 4"/>
+          <p:cNvSpPr txBox="1"/>
+          <p:nvPr/>
+        </p:nvSpPr>
+        <p:spPr>
+          <a:xfrm xmlns:a="http://schemas.openxmlformats.org/drawingml/2006/main">
+            <a:off x="8280000" y="1800000"/>
+            <a:ext cx="2880000" cy="1440000"/>
+          </a:xfrm>
+          <a:prstGeom xmlns:a="http://schemas.openxmlformats.org/drawingml/2006/main" prst="rect">
+            <a:avLst/>
+          </a:prstGeom>
+          <a:solidFill xmlns:a="http://schemas.openxmlformats.org/drawingml/2006/main">
+            <a:srgbClr val="FFC000"/>
+          </a:solidFill>
+        </p:spPr>
+        <p:txBody>
+          <a:bodyPr xmlns:a="http://schemas.openxmlformats.org/drawingml/2006/main" wrap="square"/>
+          <a:lstStyle xmlns:a="http://schemas.openxmlformats.org/drawingml/2006/main"/>
+          <a:p xmlns:a="http://schemas.openxmlformats.org/drawingml/2006/main">
+            <a:r>
+              <a:rPr lang="en-US"/>
+              <a:t>Pulses, then fades out</a:t>
+            </a:r>
+          </a:p>
+        </p:txBody>
+      </p:sp>
+    </p:spTree>
+  </p:cSld>
+  <p:clrMapOvr>
+    <a:masterClrMapping xmlns:a="http://schemas.openxmlformats.org/drawingml/2006/main"/>
+  </p:clrMapOvr>
+  <p:timing>
+    <p:tnLst>
+      <p:par>
+        <p:cTn id="1" dur="indefinite" restart="never" nodeType="tmRoot">
+          <p:childTnLst>
+            <p:seq concurrent="1" nextAc="seek">
+              <p:cTn id="2" dur="indefinite" nodeType="mainSeq">
+                <p:childTnLst>
+                  <p:par>
+                    <p:cTn id="3" fill="hold">
+                      <p:stCondLst>
+                        <p:cond delay="indefinite"/>
+                      </p:stCondLst>
+                      <p:childTnLst>
+                        <p:par>
+                          <p:cTn id="4" fill="hold">
+                            <p:stCondLst>
+                              <p:cond delay="0"/>
+                            </p:stCondLst>
+                            <p:childTnLst>
+                              <p:par>
+                                <p:cTn id="6" presetID="35" presetClass="emph" presetSubtype="0" fill="hold" grpId="0" nodeType="clickEffect">
+                                  <p:stCondLst>
+                                    <p:cond delay="0"/>
+                                  </p:stCondLst>
+                                  <p:childTnLst>
+                                    <p:animScale>
+                                      <p:cBhvr>
+                                        <p:cTn id="5" dur="500" autoRev="1" fill="hold"/>
+                                        <p:tgtEl>
+                                          <p:spTgt spid="4"/>
+                                        </p:tgtEl>
+                                      </p:cBhvr>
+                                      <p:to x="106000" y="106000"/>
+                                    </p:animScale>
+                                  </p:childTnLst>
+                                </p:cTn>
+                              </p:par>
+                              <p:par>
+                                <p:cTn id="9" presetID="10" presetClass="exit" presetSubtype="0" fill="hold" grpId="0" nodeType="afterEffect">
+                                  <p:stCondLst>
+                                    <p:cond delay="1000"/>
+                                  </p:stCondLst>
+                                  <p:childTnLst>
+                                    <p:animEffect transition="out" filter="fade">
+                                      <p:cBhvr>
+                                        <p:cTn id="7" dur="500"/>
+                                        <p:tgtEl>
+                                          <p:spTgt spid="4"/>
+                                        </p:tgtEl>
+                                      </p:cBhvr>
+                                    </p:animEffect>
+                                    <p:set>
+                                      <p:cBhvr>
+                                        <p:cTn id="8" dur="1" fill="hold">
+                                          <p:stCondLst>
+                                            <p:cond delay="499"/>
+                                          </p:stCondLst>
+                                        </p:cTn>
+                                        <p:tgtEl>
+                                          <p:spTgt spid="4"/>
+                                        </p:tgtEl>
+                                        <p:attrNameLst>
+                                          <p:attrName>style.visibility</p:attrName>
+                                        </p:attrNameLst>
+                                      </p:cBhvr>
+                                      <p:to>
+                                        <p:strVal val="hidden"/>
+                                      </p:to>
+                                    </p:set>
+                                  </p:childTnLst>
+                                </p:cTn>
+                              </p:par>
+                            </p:childTnLst>
+                          </p:cTn>
+                        </p:par>
+                      </p:childTnLst>
+                    </p:cTn>
+                  </p:par>
+                </p:childTnLst>
+              </p:cTn>
+              <p:prevCondLst>
+                <p:cond evt="onPrev" delay="0">
+                  <p:tgtEl>
+                    <p:sldTgt/>
+                  </p:tgtEl>
+                </p:cond>
+              </p:prevCondLst>
+              <p:nextCondLst>
+                <p:cond evt="onNext" delay="0">
+                  <p:tgtEl>
+                    <p:sldTgt/>
+                  </p:tgtEl>
+                </p:cond>
+              </p:nextCondLst>
+            </p:seq>
+          </p:childTnLst>
+        </p:cTn>
+      </p:par>
+    </p:tnLst>
+  </p:timing>
+</p:sld>
 </file>
--- a/fixtures/manual-check/pptx-showcase.pptx
+++ b/fixtures/manual-check/pptx-showcase.pptx
@@ -5,15 +5,15 @@
     <p:sldMasterId xmlns:r="http://schemas.openxmlformats.org/officeDocument/2006/relationships" id="2147483648" r:id="rId1"/>
   </p:sldMasterIdLst>
   <p:notesMasterIdLst>
-    <p:notesMasterId r:id="R056317649cb24bd6"/>
+    <p:notesMasterId r:id="R2b0da4a5e0604043"/>
   </p:notesMasterIdLst>
   <p:sldIdLst>
     <p:sldId xmlns:r="http://schemas.openxmlformats.org/officeDocument/2006/relationships" id="256" r:id="rId2"/>
-    <p:sldId id="257" r:id="Rd826cc36146649ff"/>
-    <p:sldId id="258" r:id="R754eddda63404d68"/>
-    <p:sldId id="259" r:id="R74cdbeb1f3764fc1"/>
-    <p:sldId id="260" r:id="Rc083c651b2824d53"/>
-    <p:sldId id="261" r:id="Red40da6d984148c0"/>
+    <p:sldId id="257" r:id="Ra730d0ee674d4305"/>
+    <p:sldId id="258" r:id="R68a765be36524e96"/>
+    <p:sldId id="259" r:id="R48b1c5c1f32b4a23"/>
+    <p:sldId id="260" r:id="R839c3fbaf97f47e9"/>
+    <p:sldId id="261" r:id="Rb593562ae8d340d4"/>
   </p:sldIdLst>
   <p:sldSz cx="12192000" cy="6858000"/>
   <p:notesSz cx="6858000" cy="9144000"/>
@@ -30,7 +30,7 @@
 
 <file path=ppt/comments/comment1.xml><?xml version="1.0" encoding="utf-8"?>
 <p:cmLst xmlns:p="http://schemas.openxmlformats.org/presentationml/2006/main">
-  <p:cm authorId="0" dt="2026-06-12T15:54:05.029818Z" idx="1">
+  <p:cm authorId="0" dt="2026-06-13T03:59:53.285639Z" idx="1">
     <p:pos x="0" y="0"/>
     <p:text>Added by aioffice M4 — check the comments pane.</p:text>
   </p:cm>
@@ -39,11 +39,11 @@
 
 <file path=ppt/comments/comment2.xml><?xml version="1.0" encoding="utf-8"?>
 <p:cmLst xmlns:p="http://schemas.openxmlformats.org/presentationml/2006/main">
-  <p:cm authorId="0" dt="2026-06-12T15:54:05.053048Z" idx="2">
+  <p:cm authorId="0" dt="2026-06-13T03:59:53.305365Z" idx="2">
     <p:pos x="0" y="0"/>
     <p:text>M5 thread root — expand to see the reply.</p:text>
   </p:cm>
-  <p:cm authorId="1" dt="2026-06-12T15:54:05.074326Z" idx="3">
+  <p:cm authorId="1" dt="2026-06-13T03:59:53.317439Z" idx="3">
     <p:pos x="0" y="0"/>
     <p:text>Threaded reply added by aioffice M5.</p:text>
     <p:extLst>
@@ -537,7 +537,7 @@
     </c:plotArea>
     <c:plotVisOnly val="1"/>
   </c:chart>
-  <c:externalData r:id="R77d925fec88040a0">
+  <c:externalData r:id="Rdba78fd2e37f4ec8">
     <c:autoUpdate val="0"/>
   </c:externalData>
 </c:chartSpace>
@@ -769,7 +769,7 @@
           <p:nvPr/>
         </p:nvPicPr>
         <p:blipFill>
-          <a:blip xmlns:r="http://schemas.openxmlformats.org/officeDocument/2006/relationships" xmlns:a="http://schemas.openxmlformats.org/drawingml/2006/main" r:embed="Rb1dd40f64be64ccb"/>
+          <a:blip xmlns:r="http://schemas.openxmlformats.org/officeDocument/2006/relationships" xmlns:a="http://schemas.openxmlformats.org/drawingml/2006/main" r:embed="R05ca7aca4e8d4717"/>
           <a:stretch xmlns:a="http://schemas.openxmlformats.org/drawingml/2006/main">
             <a:fillRect/>
           </a:stretch>
@@ -846,7 +846,7 @@
         </p:xfrm>
         <a:graphic xmlns:a="http://schemas.openxmlformats.org/drawingml/2006/main">
           <a:graphicData uri="http://schemas.openxmlformats.org/drawingml/2006/chart">
-            <c:chart xmlns:r="http://schemas.openxmlformats.org/officeDocument/2006/relationships" xmlns:c="http://schemas.openxmlformats.org/drawingml/2006/chart" r:id="Rc8bc80df29214a73"/>
+            <c:chart xmlns:r="http://schemas.openxmlformats.org/officeDocument/2006/relationships" xmlns:c="http://schemas.openxmlformats.org/drawingml/2006/chart" r:id="Re88f686328f847d9"/>
           </a:graphicData>
         </a:graphic>
       </p:graphicFrame>

--- a/fixtures/manual-check/pptx-showcase.pptx
+++ b/fixtures/manual-check/pptx-showcase.pptx
@@ -5,15 +5,15 @@
     <p:sldMasterId xmlns:r="http://schemas.openxmlformats.org/officeDocument/2006/relationships" id="2147483648" r:id="rId1"/>
   </p:sldMasterIdLst>
   <p:notesMasterIdLst>
-    <p:notesMasterId r:id="R2b0da4a5e0604043"/>
+    <p:notesMasterId r:id="Ref2a1e6b2727470e"/>
   </p:notesMasterIdLst>
   <p:sldIdLst>
     <p:sldId xmlns:r="http://schemas.openxmlformats.org/officeDocument/2006/relationships" id="256" r:id="rId2"/>
-    <p:sldId id="257" r:id="Ra730d0ee674d4305"/>
-    <p:sldId id="258" r:id="R68a765be36524e96"/>
-    <p:sldId id="259" r:id="R48b1c5c1f32b4a23"/>
-    <p:sldId id="260" r:id="R839c3fbaf97f47e9"/>
-    <p:sldId id="261" r:id="Rb593562ae8d340d4"/>
+    <p:sldId id="257" r:id="R16ac5ac2be8447d1"/>
+    <p:sldId id="258" r:id="R09dddb036b724ba7"/>
+    <p:sldId id="259" r:id="R12cf18c680d54504"/>
+    <p:sldId id="260" r:id="R720b8ee8c4b349ad"/>
+    <p:sldId id="261" r:id="R4b0a61cb5e444b14"/>
   </p:sldIdLst>
   <p:sldSz cx="12192000" cy="6858000"/>
   <p:notesSz cx="6858000" cy="9144000"/>
@@ -30,7 +30,7 @@
 
 <file path=ppt/comments/comment1.xml><?xml version="1.0" encoding="utf-8"?>
 <p:cmLst xmlns:p="http://schemas.openxmlformats.org/presentationml/2006/main">
-  <p:cm authorId="0" dt="2026-06-13T03:59:53.285639Z" idx="1">
+  <p:cm authorId="0" dt="2026-06-13T05:09:10.065953Z" idx="1">
     <p:pos x="0" y="0"/>
     <p:text>Added by aioffice M4 — check the comments pane.</p:text>
   </p:cm>
@@ -39,11 +39,11 @@
 
 <file path=ppt/comments/comment2.xml><?xml version="1.0" encoding="utf-8"?>
 <p:cmLst xmlns:p="http://schemas.openxmlformats.org/presentationml/2006/main">
-  <p:cm authorId="0" dt="2026-06-13T03:59:53.305365Z" idx="2">
+  <p:cm authorId="0" dt="2026-06-13T05:09:10.138559Z" idx="2">
     <p:pos x="0" y="0"/>
     <p:text>M5 thread root — expand to see the reply.</p:text>
   </p:cm>
-  <p:cm authorId="1" dt="2026-06-13T03:59:53.317439Z" idx="3">
+  <p:cm authorId="1" dt="2026-06-13T05:09:10.230069Z" idx="3">
     <p:pos x="0" y="0"/>
     <p:text>Threaded reply added by aioffice M5.</p:text>
     <p:extLst>
@@ -537,7 +537,7 @@
     </c:plotArea>
     <c:plotVisOnly val="1"/>
   </c:chart>
-  <c:externalData r:id="Rdba78fd2e37f4ec8">
+  <c:externalData r:id="R78afa1b0451d4a69">
     <c:autoUpdate val="0"/>
   </c:externalData>
 </c:chartSpace>
@@ -769,7 +769,7 @@
           <p:nvPr/>
         </p:nvPicPr>
         <p:blipFill>
-          <a:blip xmlns:r="http://schemas.openxmlformats.org/officeDocument/2006/relationships" xmlns:a="http://schemas.openxmlformats.org/drawingml/2006/main" r:embed="R05ca7aca4e8d4717"/>
+          <a:blip xmlns:r="http://schemas.openxmlformats.org/officeDocument/2006/relationships" xmlns:a="http://schemas.openxmlformats.org/drawingml/2006/main" r:embed="R32521e5f08174390"/>
           <a:stretch xmlns:a="http://schemas.openxmlformats.org/drawingml/2006/main">
             <a:fillRect/>
           </a:stretch>
@@ -846,7 +846,7 @@
         </p:xfrm>
         <a:graphic xmlns:a="http://schemas.openxmlformats.org/drawingml/2006/main">
           <a:graphicData uri="http://schemas.openxmlformats.org/drawingml/2006/chart">
-            <c:chart xmlns:r="http://schemas.openxmlformats.org/officeDocument/2006/relationships" xmlns:c="http://schemas.openxmlformats.org/drawingml/2006/chart" r:id="Re88f686328f847d9"/>
+            <c:chart xmlns:r="http://schemas.openxmlformats.org/officeDocument/2006/relationships" xmlns:c="http://schemas.openxmlformats.org/drawingml/2006/chart" r:id="Rba940ce7f7a64a68"/>
           </a:graphicData>
         </a:graphic>
       </p:graphicFrame>

--- a/fixtures/manual-check/pptx-showcase.pptx
+++ b/fixtures/manual-check/pptx-showcase.pptx
@@ -5,15 +5,16 @@
     <p:sldMasterId xmlns:r="http://schemas.openxmlformats.org/officeDocument/2006/relationships" id="2147483648" r:id="rId1"/>
   </p:sldMasterIdLst>
   <p:notesMasterIdLst>
-    <p:notesMasterId r:id="Ref2a1e6b2727470e"/>
+    <p:notesMasterId r:id="R52fc9b7481084b83"/>
   </p:notesMasterIdLst>
   <p:sldIdLst>
     <p:sldId xmlns:r="http://schemas.openxmlformats.org/officeDocument/2006/relationships" id="256" r:id="rId2"/>
-    <p:sldId id="257" r:id="R16ac5ac2be8447d1"/>
-    <p:sldId id="258" r:id="R09dddb036b724ba7"/>
-    <p:sldId id="259" r:id="R12cf18c680d54504"/>
-    <p:sldId id="260" r:id="R720b8ee8c4b349ad"/>
-    <p:sldId id="261" r:id="R4b0a61cb5e444b14"/>
+    <p:sldId id="257" r:id="R28752d083020499b"/>
+    <p:sldId id="258" r:id="R2b6f8749726749c3"/>
+    <p:sldId id="259" r:id="R74bac00a7a724925"/>
+    <p:sldId id="260" r:id="R4a14bbc67acc4820"/>
+    <p:sldId id="261" r:id="R448366ec47ca441a"/>
+    <p:sldId id="262" r:id="Rb9d0fe26d1c944d7"/>
   </p:sldIdLst>
   <p:sldSz cx="12192000" cy="6858000"/>
   <p:notesSz cx="6858000" cy="9144000"/>
@@ -30,7 +31,7 @@
 
 <file path=ppt/comments/comment1.xml><?xml version="1.0" encoding="utf-8"?>
 <p:cmLst xmlns:p="http://schemas.openxmlformats.org/presentationml/2006/main">
-  <p:cm authorId="0" dt="2026-06-13T05:09:10.065953Z" idx="1">
+  <p:cm authorId="0" dt="2026-06-13T09:12:46.063642Z" idx="1">
     <p:pos x="0" y="0"/>
     <p:text>Added by aioffice M4 — check the comments pane.</p:text>
   </p:cm>
@@ -39,11 +40,11 @@
 
 <file path=ppt/comments/comment2.xml><?xml version="1.0" encoding="utf-8"?>
 <p:cmLst xmlns:p="http://schemas.openxmlformats.org/presentationml/2006/main">
-  <p:cm authorId="0" dt="2026-06-13T05:09:10.138559Z" idx="2">
+  <p:cm authorId="0" dt="2026-06-13T09:12:46.130807Z" idx="2">
     <p:pos x="0" y="0"/>
     <p:text>M5 thread root — expand to see the reply.</p:text>
   </p:cm>
-  <p:cm authorId="1" dt="2026-06-13T05:09:10.230069Z" idx="3">
+  <p:cm authorId="1" dt="2026-06-13T09:12:46.134207Z" idx="3">
     <p:pos x="0" y="0"/>
     <p:text>Threaded reply added by aioffice M5.</p:text>
     <p:extLst>
@@ -537,7 +538,7 @@
     </c:plotArea>
     <c:plotVisOnly val="1"/>
   </c:chart>
-  <c:externalData r:id="R78afa1b0451d4a69">
+  <c:externalData r:id="R268401dbc04d4c9a">
     <c:autoUpdate val="0"/>
   </c:externalData>
 </c:chartSpace>
@@ -769,7 +770,7 @@
           <p:nvPr/>
         </p:nvPicPr>
         <p:blipFill>
-          <a:blip xmlns:r="http://schemas.openxmlformats.org/officeDocument/2006/relationships" xmlns:a="http://schemas.openxmlformats.org/drawingml/2006/main" r:embed="R32521e5f08174390"/>
+          <a:blip xmlns:r="http://schemas.openxmlformats.org/officeDocument/2006/relationships" xmlns:a="http://schemas.openxmlformats.org/drawingml/2006/main" r:embed="Rfd36555169004d46"/>
           <a:stretch xmlns:a="http://schemas.openxmlformats.org/drawingml/2006/main">
             <a:fillRect/>
           </a:stretch>
@@ -846,7 +847,7 @@
         </p:xfrm>
         <a:graphic xmlns:a="http://schemas.openxmlformats.org/drawingml/2006/main">
           <a:graphicData uri="http://schemas.openxmlformats.org/drawingml/2006/chart">
-            <c:chart xmlns:r="http://schemas.openxmlformats.org/officeDocument/2006/relationships" xmlns:c="http://schemas.openxmlformats.org/drawingml/2006/chart" r:id="Rba940ce7f7a64a68"/>
+            <c:chart xmlns:r="http://schemas.openxmlformats.org/officeDocument/2006/relationships" xmlns:c="http://schemas.openxmlformats.org/drawingml/2006/chart" r:id="Rb14a3ab6c07c436c"/>
           </a:graphicData>
         </a:graphic>
       </p:graphicFrame>
@@ -1926,4 +1927,162 @@
     </p:tnLst>
   </p:timing>
 </p:sld>
+</file>
+
+<file path=ppt/slides/slide7.xml><?xml version="1.0" encoding="utf-8"?>
+<p:sld xmlns:a="http://schemas.openxmlformats.org/drawingml/2006/main" xmlns:p="http://schemas.openxmlformats.org/presentationml/2006/main">
+  <p:cSld>
+    <p:spTree>
+      <p:nvGrpSpPr>
+        <p:cNvPr id="1" name=""/>
+        <p:cNvGrpSpPr/>
+        <p:nvPr/>
+      </p:nvGrpSpPr>
+      <p:grpSpPr>
+        <a:xfrm xmlns:a="http://schemas.openxmlformats.org/drawingml/2006/main"/>
+      </p:grpSpPr>
+      <p:sp>
+        <p:nvSpPr>
+          <p:cNvPr id="2" name="Title"/>
+          <p:cNvSpPr>
+            <a:spLocks xmlns:a="http://schemas.openxmlformats.org/drawingml/2006/main" noGrp="1"/>
+          </p:cNvSpPr>
+          <p:nvPr>
+            <p:ph type="title"/>
+          </p:nvPr>
+        </p:nvSpPr>
+        <p:spPr>
+          <a:xfrm xmlns:a="http://schemas.openxmlformats.org/drawingml/2006/main">
+            <a:off x="831850" y="365125"/>
+            <a:ext cx="10515600" cy="1325563"/>
+          </a:xfrm>
+          <a:prstGeom xmlns:a="http://schemas.openxmlformats.org/drawingml/2006/main" prst="rect">
+            <a:avLst/>
+          </a:prstGeom>
+        </p:spPr>
+        <p:txBody>
+          <a:bodyPr xmlns:a="http://schemas.openxmlformats.org/drawingml/2006/main"/>
+          <a:lstStyle xmlns:a="http://schemas.openxmlformats.org/drawingml/2006/main"/>
+          <a:p xmlns:a="http://schemas.openxmlformats.org/drawingml/2006/main">
+            <a:r>
+              <a:rPr lang="en-US" sz="4000"/>
+              <a:t>M8: shape hyperlinks &amp; actions</a:t>
+            </a:r>
+          </a:p>
+        </p:txBody>
+      </p:sp>
+      <p:sp>
+        <p:nvSpPr>
+          <p:cNvPr id="3" name="RoundRect 3">
+            <a:hlinkClick xmlns:r="http://schemas.openxmlformats.org/officeDocument/2006/relationships" r:id="R0bb64233912d4c77"/>
+          </p:cNvPr>
+          <p:cNvSpPr/>
+          <p:nvPr/>
+        </p:nvSpPr>
+        <p:spPr>
+          <a:xfrm xmlns:a="http://schemas.openxmlformats.org/drawingml/2006/main">
+            <a:off x="720000" y="2160000"/>
+            <a:ext cx="2880000" cy="1080000"/>
+          </a:xfrm>
+          <a:prstGeom xmlns:a="http://schemas.openxmlformats.org/drawingml/2006/main" prst="roundRect">
+            <a:avLst/>
+          </a:prstGeom>
+          <a:solidFill xmlns:a="http://schemas.openxmlformats.org/drawingml/2006/main">
+            <a:srgbClr val="4472C4"/>
+          </a:solidFill>
+        </p:spPr>
+        <p:txBody>
+          <a:bodyPr xmlns:a="http://schemas.openxmlformats.org/drawingml/2006/main" wrap="square"/>
+          <a:lstStyle xmlns:a="http://schemas.openxmlformats.org/drawingml/2006/main"/>
+          <a:p xmlns:a="http://schemas.openxmlformats.org/drawingml/2006/main">
+            <a:pPr algn="ctr"/>
+            <a:r>
+              <a:rPr lang="en-US">
+                <a:solidFill>
+                  <a:srgbClr val="FFFFFF"/>
+                </a:solidFill>
+              </a:rPr>
+              <a:t>Open the web</a:t>
+            </a:r>
+          </a:p>
+        </p:txBody>
+      </p:sp>
+      <p:sp>
+        <p:nvSpPr>
+          <p:cNvPr id="4" name="RoundRect 4">
+            <a:hlinkClick xmlns:r="http://schemas.openxmlformats.org/officeDocument/2006/relationships" r:id="Re0a6914941fa4eee" action="ppaction://hlinksldjump"/>
+          </p:cNvPr>
+          <p:cNvSpPr/>
+          <p:nvPr/>
+        </p:nvSpPr>
+        <p:spPr>
+          <a:xfrm xmlns:a="http://schemas.openxmlformats.org/drawingml/2006/main">
+            <a:off x="4320000" y="2160000"/>
+            <a:ext cx="2880000" cy="1080000"/>
+          </a:xfrm>
+          <a:prstGeom xmlns:a="http://schemas.openxmlformats.org/drawingml/2006/main" prst="roundRect">
+            <a:avLst/>
+          </a:prstGeom>
+          <a:solidFill xmlns:a="http://schemas.openxmlformats.org/drawingml/2006/main">
+            <a:srgbClr val="70AD47"/>
+          </a:solidFill>
+        </p:spPr>
+        <p:txBody>
+          <a:bodyPr xmlns:a="http://schemas.openxmlformats.org/drawingml/2006/main" wrap="square"/>
+          <a:lstStyle xmlns:a="http://schemas.openxmlformats.org/drawingml/2006/main"/>
+          <a:p xmlns:a="http://schemas.openxmlformats.org/drawingml/2006/main">
+            <a:pPr algn="ctr"/>
+            <a:r>
+              <a:rPr lang="en-US">
+                <a:solidFill>
+                  <a:srgbClr val="FFFFFF"/>
+                </a:solidFill>
+              </a:rPr>
+              <a:t>Back to slide 1</a:t>
+            </a:r>
+          </a:p>
+        </p:txBody>
+      </p:sp>
+      <p:sp>
+        <p:nvSpPr>
+          <p:cNvPr id="5" name="RoundRect 5">
+            <a:hlinkClick xmlns:r="http://schemas.openxmlformats.org/officeDocument/2006/relationships" r:id="" action="ppaction://hlinkshowjump?jump=endshow"/>
+          </p:cNvPr>
+          <p:cNvSpPr/>
+          <p:nvPr/>
+        </p:nvSpPr>
+        <p:spPr>
+          <a:xfrm xmlns:a="http://schemas.openxmlformats.org/drawingml/2006/main">
+            <a:off x="7920000" y="2160000"/>
+            <a:ext cx="2880000" cy="1080000"/>
+          </a:xfrm>
+          <a:prstGeom xmlns:a="http://schemas.openxmlformats.org/drawingml/2006/main" prst="roundRect">
+            <a:avLst/>
+          </a:prstGeom>
+          <a:solidFill xmlns:a="http://schemas.openxmlformats.org/drawingml/2006/main">
+            <a:srgbClr val="ED7D31"/>
+          </a:solidFill>
+        </p:spPr>
+        <p:txBody>
+          <a:bodyPr xmlns:a="http://schemas.openxmlformats.org/drawingml/2006/main" wrap="square"/>
+          <a:lstStyle xmlns:a="http://schemas.openxmlformats.org/drawingml/2006/main"/>
+          <a:p xmlns:a="http://schemas.openxmlformats.org/drawingml/2006/main">
+            <a:pPr algn="ctr"/>
+            <a:r>
+              <a:rPr lang="en-US">
+                <a:solidFill>
+                  <a:srgbClr val="FFFFFF"/>
+                </a:solidFill>
+              </a:rPr>
+              <a:t>End the show</a:t>
+            </a:r>
+          </a:p>
+        </p:txBody>
+      </p:sp>
+    </p:spTree>
+  </p:cSld>
+  <p:clrMapOvr>
+    <a:masterClrMapping xmlns:a="http://schemas.openxmlformats.org/drawingml/2006/main"/>
+  </p:clrMapOvr>
+</p:sld>
 </file>
--- a/fixtures/manual-check/pptx-showcase.pptx
+++ b/fixtures/manual-check/pptx-showcase.pptx
@@ -5,16 +5,16 @@
     <p:sldMasterId xmlns:r="http://schemas.openxmlformats.org/officeDocument/2006/relationships" id="2147483648" r:id="rId1"/>
   </p:sldMasterIdLst>
   <p:notesMasterIdLst>
-    <p:notesMasterId r:id="R52fc9b7481084b83"/>
+    <p:notesMasterId r:id="R80b104f21a2447a3"/>
   </p:notesMasterIdLst>
   <p:sldIdLst>
     <p:sldId xmlns:r="http://schemas.openxmlformats.org/officeDocument/2006/relationships" id="256" r:id="rId2"/>
-    <p:sldId id="257" r:id="R28752d083020499b"/>
-    <p:sldId id="258" r:id="R2b6f8749726749c3"/>
-    <p:sldId id="259" r:id="R74bac00a7a724925"/>
-    <p:sldId id="260" r:id="R4a14bbc67acc4820"/>
-    <p:sldId id="261" r:id="R448366ec47ca441a"/>
-    <p:sldId id="262" r:id="Rb9d0fe26d1c944d7"/>
+    <p:sldId id="257" r:id="R8839e37e5f904563"/>
+    <p:sldId id="258" r:id="R1b493cedd26141b1"/>
+    <p:sldId id="259" r:id="Rbf0c479c777d4767"/>
+    <p:sldId id="260" r:id="R20a00d22ad2a4759"/>
+    <p:sldId id="261" r:id="Rd8aaab3ac34b4b45"/>
+    <p:sldId id="262" r:id="R2bb8f2293b4e4952"/>
   </p:sldIdLst>
   <p:sldSz cx="12192000" cy="6858000"/>
   <p:notesSz cx="6858000" cy="9144000"/>
@@ -31,7 +31,7 @@
 
 <file path=ppt/comments/comment1.xml><?xml version="1.0" encoding="utf-8"?>
 <p:cmLst xmlns:p="http://schemas.openxmlformats.org/presentationml/2006/main">
-  <p:cm authorId="0" dt="2026-06-13T09:12:46.063642Z" idx="1">
+  <p:cm authorId="0" dt="2026-06-13T11:13:28.800498Z" idx="1">
     <p:pos x="0" y="0"/>
     <p:text>Added by aioffice M4 — check the comments pane.</p:text>
   </p:cm>
@@ -40,11 +40,11 @@
 
 <file path=ppt/comments/comment2.xml><?xml version="1.0" encoding="utf-8"?>
 <p:cmLst xmlns:p="http://schemas.openxmlformats.org/presentationml/2006/main">
-  <p:cm authorId="0" dt="2026-06-13T09:12:46.130807Z" idx="2">
+  <p:cm authorId="0" dt="2026-06-13T11:13:28.896219Z" idx="2">
     <p:pos x="0" y="0"/>
     <p:text>M5 thread root — expand to see the reply.</p:text>
   </p:cm>
-  <p:cm authorId="1" dt="2026-06-13T09:12:46.134207Z" idx="3">
+  <p:cm authorId="1" dt="2026-06-13T11:13:28.911455Z" idx="3">
     <p:pos x="0" y="0"/>
     <p:text>Threaded reply added by aioffice M5.</p:text>
     <p:extLst>
@@ -538,7 +538,7 @@
     </c:plotArea>
     <c:plotVisOnly val="1"/>
   </c:chart>
-  <c:externalData r:id="R268401dbc04d4c9a">
+  <c:externalData r:id="R942657d40d634073">
     <c:autoUpdate val="0"/>
   </c:externalData>
 </c:chartSpace>
@@ -770,7 +770,7 @@
           <p:nvPr/>
         </p:nvPicPr>
         <p:blipFill>
-          <a:blip xmlns:r="http://schemas.openxmlformats.org/officeDocument/2006/relationships" xmlns:a="http://schemas.openxmlformats.org/drawingml/2006/main" r:embed="Rfd36555169004d46"/>
+          <a:blip xmlns:r="http://schemas.openxmlformats.org/officeDocument/2006/relationships" xmlns:a="http://schemas.openxmlformats.org/drawingml/2006/main" r:embed="R38b7f7e9fa6a4a4e"/>
           <a:stretch xmlns:a="http://schemas.openxmlformats.org/drawingml/2006/main">
             <a:fillRect/>
           </a:stretch>
@@ -847,7 +847,7 @@
         </p:xfrm>
         <a:graphic xmlns:a="http://schemas.openxmlformats.org/drawingml/2006/main">
           <a:graphicData uri="http://schemas.openxmlformats.org/drawingml/2006/chart">
-            <c:chart xmlns:r="http://schemas.openxmlformats.org/officeDocument/2006/relationships" xmlns:c="http://schemas.openxmlformats.org/drawingml/2006/chart" r:id="Rb14a3ab6c07c436c"/>
+            <c:chart xmlns:r="http://schemas.openxmlformats.org/officeDocument/2006/relationships" xmlns:c="http://schemas.openxmlformats.org/drawingml/2006/chart" r:id="Ra5509bb3bb004a5e"/>
           </a:graphicData>
         </a:graphic>
       </p:graphicFrame>
@@ -1974,7 +1974,7 @@
       <p:sp>
         <p:nvSpPr>
           <p:cNvPr id="3" name="RoundRect 3">
-            <a:hlinkClick xmlns:r="http://schemas.openxmlformats.org/officeDocument/2006/relationships" r:id="R0bb64233912d4c77"/>
+            <a:hlinkClick xmlns:r="http://schemas.openxmlformats.org/officeDocument/2006/relationships" r:id="R7f7bf60f2d1049b5"/>
           </p:cNvPr>
           <p:cNvSpPr/>
           <p:nvPr/>
@@ -2010,7 +2010,7 @@
       <p:sp>
         <p:nvSpPr>
           <p:cNvPr id="4" name="RoundRect 4">
-            <a:hlinkClick xmlns:r="http://schemas.openxmlformats.org/officeDocument/2006/relationships" r:id="Re0a6914941fa4eee" action="ppaction://hlinksldjump"/>
+            <a:hlinkClick xmlns:r="http://schemas.openxmlformats.org/officeDocument/2006/relationships" r:id="R98685d93fc61476c" action="ppaction://hlinksldjump"/>
           </p:cNvPr>
           <p:cNvSpPr/>
           <p:nvPr/>

--- a/fixtures/manual-check/pptx-showcase.pptx
+++ b/fixtures/manual-check/pptx-showcase.pptx
@@ -5,16 +5,16 @@
     <p:sldMasterId xmlns:r="http://schemas.openxmlformats.org/officeDocument/2006/relationships" id="2147483648" r:id="rId1"/>
   </p:sldMasterIdLst>
   <p:notesMasterIdLst>
-    <p:notesMasterId r:id="R80b104f21a2447a3"/>
+    <p:notesMasterId r:id="Re02b7319c2664b5a"/>
   </p:notesMasterIdLst>
   <p:sldIdLst>
     <p:sldId xmlns:r="http://schemas.openxmlformats.org/officeDocument/2006/relationships" id="256" r:id="rId2"/>
-    <p:sldId id="257" r:id="R8839e37e5f904563"/>
-    <p:sldId id="258" r:id="R1b493cedd26141b1"/>
-    <p:sldId id="259" r:id="Rbf0c479c777d4767"/>
-    <p:sldId id="260" r:id="R20a00d22ad2a4759"/>
-    <p:sldId id="261" r:id="Rd8aaab3ac34b4b45"/>
-    <p:sldId id="262" r:id="R2bb8f2293b4e4952"/>
+    <p:sldId id="257" r:id="Rb6ce74dd8d614748"/>
+    <p:sldId id="258" r:id="R761f11329cc44be8"/>
+    <p:sldId id="259" r:id="Rfaf6c4c767ac4283"/>
+    <p:sldId id="260" r:id="R33d43e35d1d04092"/>
+    <p:sldId id="261" r:id="Ra0339eaf8dcf4344"/>
+    <p:sldId id="262" r:id="R9ae9a3fac95e4c21"/>
   </p:sldIdLst>
   <p:sldSz cx="12192000" cy="6858000"/>
   <p:notesSz cx="6858000" cy="9144000"/>
@@ -31,7 +31,7 @@
 
 <file path=ppt/comments/comment1.xml><?xml version="1.0" encoding="utf-8"?>
 <p:cmLst xmlns:p="http://schemas.openxmlformats.org/presentationml/2006/main">
-  <p:cm authorId="0" dt="2026-06-13T11:13:28.800498Z" idx="1">
+  <p:cm authorId="0" dt="2026-06-13T13:23:13.724232Z" idx="1">
     <p:pos x="0" y="0"/>
     <p:text>Added by aioffice M4 — check the comments pane.</p:text>
   </p:cm>
@@ -40,11 +40,11 @@
 
 <file path=ppt/comments/comment2.xml><?xml version="1.0" encoding="utf-8"?>
 <p:cmLst xmlns:p="http://schemas.openxmlformats.org/presentationml/2006/main">
-  <p:cm authorId="0" dt="2026-06-13T11:13:28.896219Z" idx="2">
+  <p:cm authorId="0" dt="2026-06-13T13:23:13.786021Z" idx="2">
     <p:pos x="0" y="0"/>
     <p:text>M5 thread root — expand to see the reply.</p:text>
   </p:cm>
-  <p:cm authorId="1" dt="2026-06-13T11:13:28.911455Z" idx="3">
+  <p:cm authorId="1" dt="2026-06-13T13:23:13.788708Z" idx="3">
     <p:pos x="0" y="0"/>
     <p:text>Threaded reply added by aioffice M5.</p:text>
     <p:extLst>
@@ -538,7 +538,7 @@
     </c:plotArea>
     <c:plotVisOnly val="1"/>
   </c:chart>
-  <c:externalData r:id="R942657d40d634073">
+  <c:externalData r:id="R664c84a66d2d4850">
     <c:autoUpdate val="0"/>
   </c:externalData>
 </c:chartSpace>
@@ -770,7 +770,7 @@
           <p:nvPr/>
         </p:nvPicPr>
         <p:blipFill>
-          <a:blip xmlns:r="http://schemas.openxmlformats.org/officeDocument/2006/relationships" xmlns:a="http://schemas.openxmlformats.org/drawingml/2006/main" r:embed="R38b7f7e9fa6a4a4e"/>
+          <a:blip xmlns:r="http://schemas.openxmlformats.org/officeDocument/2006/relationships" xmlns:a="http://schemas.openxmlformats.org/drawingml/2006/main" r:embed="Rfec3df092ed44dc2"/>
           <a:stretch xmlns:a="http://schemas.openxmlformats.org/drawingml/2006/main">
             <a:fillRect/>
           </a:stretch>
@@ -847,7 +847,7 @@
         </p:xfrm>
         <a:graphic xmlns:a="http://schemas.openxmlformats.org/drawingml/2006/main">
           <a:graphicData uri="http://schemas.openxmlformats.org/drawingml/2006/chart">
-            <c:chart xmlns:r="http://schemas.openxmlformats.org/officeDocument/2006/relationships" xmlns:c="http://schemas.openxmlformats.org/drawingml/2006/chart" r:id="Ra5509bb3bb004a5e"/>
+            <c:chart xmlns:r="http://schemas.openxmlformats.org/officeDocument/2006/relationships" xmlns:c="http://schemas.openxmlformats.org/drawingml/2006/chart" r:id="R9b26948bd9824d34"/>
           </a:graphicData>
         </a:graphic>
       </p:graphicFrame>
@@ -1974,7 +1974,7 @@
       <p:sp>
         <p:nvSpPr>
           <p:cNvPr id="3" name="RoundRect 3">
-            <a:hlinkClick xmlns:r="http://schemas.openxmlformats.org/officeDocument/2006/relationships" r:id="R7f7bf60f2d1049b5"/>
+            <a:hlinkClick xmlns:r="http://schemas.openxmlformats.org/officeDocument/2006/relationships" r:id="R533facae77bf4cbe"/>
           </p:cNvPr>
           <p:cNvSpPr/>
           <p:nvPr/>
@@ -2010,7 +2010,7 @@
       <p:sp>
         <p:nvSpPr>
           <p:cNvPr id="4" name="RoundRect 4">
-            <a:hlinkClick xmlns:r="http://schemas.openxmlformats.org/officeDocument/2006/relationships" r:id="R98685d93fc61476c" action="ppaction://hlinksldjump"/>
+            <a:hlinkClick xmlns:r="http://schemas.openxmlformats.org/officeDocument/2006/relationships" r:id="R63fd5a3a38cf4f18" action="ppaction://hlinksldjump"/>
           </p:cNvPr>
           <p:cNvSpPr/>
           <p:nvPr/>

--- a/fixtures/manual-check/pptx-showcase.pptx
+++ b/fixtures/manual-check/pptx-showcase.pptx
@@ -5,16 +5,16 @@
     <p:sldMasterId xmlns:r="http://schemas.openxmlformats.org/officeDocument/2006/relationships" id="2147483648" r:id="rId1"/>
   </p:sldMasterIdLst>
   <p:notesMasterIdLst>
-    <p:notesMasterId r:id="Re02b7319c2664b5a"/>
+    <p:notesMasterId r:id="R24cb9795ef314358"/>
   </p:notesMasterIdLst>
   <p:sldIdLst>
     <p:sldId xmlns:r="http://schemas.openxmlformats.org/officeDocument/2006/relationships" id="256" r:id="rId2"/>
-    <p:sldId id="257" r:id="Rb6ce74dd8d614748"/>
-    <p:sldId id="258" r:id="R761f11329cc44be8"/>
-    <p:sldId id="259" r:id="Rfaf6c4c767ac4283"/>
-    <p:sldId id="260" r:id="R33d43e35d1d04092"/>
-    <p:sldId id="261" r:id="Ra0339eaf8dcf4344"/>
-    <p:sldId id="262" r:id="R9ae9a3fac95e4c21"/>
+    <p:sldId id="257" r:id="R30e810a6d16b477a"/>
+    <p:sldId id="258" r:id="R208a2f78a4294e44"/>
+    <p:sldId id="259" r:id="Rcdad3ffb711a4972"/>
+    <p:sldId id="260" r:id="R81300af7555643ec"/>
+    <p:sldId id="261" r:id="R6332910075e54072"/>
+    <p:sldId id="262" r:id="Re667242aa46143c6"/>
   </p:sldIdLst>
   <p:sldSz cx="12192000" cy="6858000"/>
   <p:notesSz cx="6858000" cy="9144000"/>
@@ -31,7 +31,7 @@
 
 <file path=ppt/comments/comment1.xml><?xml version="1.0" encoding="utf-8"?>
 <p:cmLst xmlns:p="http://schemas.openxmlformats.org/presentationml/2006/main">
-  <p:cm authorId="0" dt="2026-06-13T13:23:13.724232Z" idx="1">
+  <p:cm authorId="0" dt="2026-06-13T15:10:57.033977Z" idx="1">
     <p:pos x="0" y="0"/>
     <p:text>Added by aioffice M4 — check the comments pane.</p:text>
   </p:cm>
@@ -40,11 +40,11 @@
 
 <file path=ppt/comments/comment2.xml><?xml version="1.0" encoding="utf-8"?>
 <p:cmLst xmlns:p="http://schemas.openxmlformats.org/presentationml/2006/main">
-  <p:cm authorId="0" dt="2026-06-13T13:23:13.786021Z" idx="2">
+  <p:cm authorId="0" dt="2026-06-13T15:10:57.169813Z" idx="2">
     <p:pos x="0" y="0"/>
     <p:text>M5 thread root — expand to see the reply.</p:text>
   </p:cm>
-  <p:cm authorId="1" dt="2026-06-13T13:23:13.788708Z" idx="3">
+  <p:cm authorId="1" dt="2026-06-13T15:10:57.174349Z" idx="3">
     <p:pos x="0" y="0"/>
     <p:text>Threaded reply added by aioffice M5.</p:text>
     <p:extLst>
@@ -538,7 +538,7 @@
     </c:plotArea>
     <c:plotVisOnly val="1"/>
   </c:chart>
-  <c:externalData r:id="R664c84a66d2d4850">
+  <c:externalData r:id="R9bdeab7ff1d0404f">
     <c:autoUpdate val="0"/>
   </c:externalData>
 </c:chartSpace>
@@ -770,7 +770,7 @@
           <p:nvPr/>
         </p:nvPicPr>
         <p:blipFill>
-          <a:blip xmlns:r="http://schemas.openxmlformats.org/officeDocument/2006/relationships" xmlns:a="http://schemas.openxmlformats.org/drawingml/2006/main" r:embed="Rfec3df092ed44dc2"/>
+          <a:blip xmlns:r="http://schemas.openxmlformats.org/officeDocument/2006/relationships" xmlns:a="http://schemas.openxmlformats.org/drawingml/2006/main" r:embed="R91a2e03b09c34c20"/>
           <a:stretch xmlns:a="http://schemas.openxmlformats.org/drawingml/2006/main">
             <a:fillRect/>
           </a:stretch>
@@ -847,7 +847,7 @@
         </p:xfrm>
         <a:graphic xmlns:a="http://schemas.openxmlformats.org/drawingml/2006/main">
           <a:graphicData uri="http://schemas.openxmlformats.org/drawingml/2006/chart">
-            <c:chart xmlns:r="http://schemas.openxmlformats.org/officeDocument/2006/relationships" xmlns:c="http://schemas.openxmlformats.org/drawingml/2006/chart" r:id="R9b26948bd9824d34"/>
+            <c:chart xmlns:r="http://schemas.openxmlformats.org/officeDocument/2006/relationships" xmlns:c="http://schemas.openxmlformats.org/drawingml/2006/chart" r:id="R0a4c355fc3bb4307"/>
           </a:graphicData>
         </a:graphic>
       </p:graphicFrame>
@@ -1974,7 +1974,7 @@
       <p:sp>
         <p:nvSpPr>
           <p:cNvPr id="3" name="RoundRect 3">
-            <a:hlinkClick xmlns:r="http://schemas.openxmlformats.org/officeDocument/2006/relationships" r:id="R533facae77bf4cbe"/>
+            <a:hlinkClick xmlns:r="http://schemas.openxmlformats.org/officeDocument/2006/relationships" r:id="Rb6aa662eac9f47b6"/>
           </p:cNvPr>
           <p:cNvSpPr/>
           <p:nvPr/>
@@ -2010,7 +2010,7 @@
       <p:sp>
         <p:nvSpPr>
           <p:cNvPr id="4" name="RoundRect 4">
-            <a:hlinkClick xmlns:r="http://schemas.openxmlformats.org/officeDocument/2006/relationships" r:id="R63fd5a3a38cf4f18" action="ppaction://hlinksldjump"/>
+            <a:hlinkClick xmlns:r="http://schemas.openxmlformats.org/officeDocument/2006/relationships" r:id="R607186c9dded4856" action="ppaction://hlinksldjump"/>
           </p:cNvPr>
           <p:cNvSpPr/>
           <p:nvPr/>

--- a/fixtures/manual-check/pptx-showcase.pptx
+++ b/fixtures/manual-check/pptx-showcase.pptx
@@ -5,16 +5,16 @@
     <p:sldMasterId xmlns:r="http://schemas.openxmlformats.org/officeDocument/2006/relationships" id="2147483648" r:id="rId1"/>
   </p:sldMasterIdLst>
   <p:notesMasterIdLst>
-    <p:notesMasterId r:id="R24cb9795ef314358"/>
+    <p:notesMasterId r:id="R6966ed8a03d74608"/>
   </p:notesMasterIdLst>
   <p:sldIdLst>
     <p:sldId xmlns:r="http://schemas.openxmlformats.org/officeDocument/2006/relationships" id="256" r:id="rId2"/>
-    <p:sldId id="257" r:id="R30e810a6d16b477a"/>
-    <p:sldId id="258" r:id="R208a2f78a4294e44"/>
-    <p:sldId id="259" r:id="Rcdad3ffb711a4972"/>
-    <p:sldId id="260" r:id="R81300af7555643ec"/>
-    <p:sldId id="261" r:id="R6332910075e54072"/>
-    <p:sldId id="262" r:id="Re667242aa46143c6"/>
+    <p:sldId id="257" r:id="R624a9023b2c24525"/>
+    <p:sldId id="258" r:id="R93de2f7166d446d7"/>
+    <p:sldId id="259" r:id="R23a38976ce2245c6"/>
+    <p:sldId id="260" r:id="R192112d1ad5f4126"/>
+    <p:sldId id="261" r:id="Rfb4154e8de5b463e"/>
+    <p:sldId id="262" r:id="Rb5efa6b9fb3a47f8"/>
   </p:sldIdLst>
   <p:sldSz cx="12192000" cy="6858000"/>
   <p:notesSz cx="6858000" cy="9144000"/>
@@ -31,7 +31,7 @@
 
 <file path=ppt/comments/comment1.xml><?xml version="1.0" encoding="utf-8"?>
 <p:cmLst xmlns:p="http://schemas.openxmlformats.org/presentationml/2006/main">
-  <p:cm authorId="0" dt="2026-06-13T15:10:57.033977Z" idx="1">
+  <p:cm authorId="0" dt="2026-06-15T03:24:49.390187Z" idx="1">
     <p:pos x="0" y="0"/>
     <p:text>Added by aioffice M4 — check the comments pane.</p:text>
   </p:cm>
@@ -40,11 +40,11 @@
 
 <file path=ppt/comments/comment2.xml><?xml version="1.0" encoding="utf-8"?>
 <p:cmLst xmlns:p="http://schemas.openxmlformats.org/presentationml/2006/main">
-  <p:cm authorId="0" dt="2026-06-13T15:10:57.169813Z" idx="2">
+  <p:cm authorId="0" dt="2026-06-15T03:24:49.406034Z" idx="2">
     <p:pos x="0" y="0"/>
     <p:text>M5 thread root — expand to see the reply.</p:text>
   </p:cm>
-  <p:cm authorId="1" dt="2026-06-13T15:10:57.174349Z" idx="3">
+  <p:cm authorId="1" dt="2026-06-15T03:24:49.408711Z" idx="3">
     <p:pos x="0" y="0"/>
     <p:text>Threaded reply added by aioffice M5.</p:text>
     <p:extLst>
@@ -538,7 +538,7 @@
     </c:plotArea>
     <c:plotVisOnly val="1"/>
   </c:chart>
-  <c:externalData r:id="R9bdeab7ff1d0404f">
+  <c:externalData r:id="Rd2cbf666402e40a0">
     <c:autoUpdate val="0"/>
   </c:externalData>
 </c:chartSpace>
@@ -770,7 +770,7 @@
           <p:nvPr/>
         </p:nvPicPr>
         <p:blipFill>
-          <a:blip xmlns:r="http://schemas.openxmlformats.org/officeDocument/2006/relationships" xmlns:a="http://schemas.openxmlformats.org/drawingml/2006/main" r:embed="R91a2e03b09c34c20"/>
+          <a:blip xmlns:r="http://schemas.openxmlformats.org/officeDocument/2006/relationships" xmlns:a="http://schemas.openxmlformats.org/drawingml/2006/main" r:embed="R001a57295fb74728"/>
           <a:stretch xmlns:a="http://schemas.openxmlformats.org/drawingml/2006/main">
             <a:fillRect/>
           </a:stretch>
@@ -847,7 +847,7 @@
         </p:xfrm>
         <a:graphic xmlns:a="http://schemas.openxmlformats.org/drawingml/2006/main">
           <a:graphicData uri="http://schemas.openxmlformats.org/drawingml/2006/chart">
-            <c:chart xmlns:r="http://schemas.openxmlformats.org/officeDocument/2006/relationships" xmlns:c="http://schemas.openxmlformats.org/drawingml/2006/chart" r:id="R0a4c355fc3bb4307"/>
+            <c:chart xmlns:r="http://schemas.openxmlformats.org/officeDocument/2006/relationships" xmlns:c="http://schemas.openxmlformats.org/drawingml/2006/chart" r:id="R7a6a73925f2646b5"/>
           </a:graphicData>
         </a:graphic>
       </p:graphicFrame>
@@ -1974,7 +1974,7 @@
       <p:sp>
         <p:nvSpPr>
           <p:cNvPr id="3" name="RoundRect 3">
-            <a:hlinkClick xmlns:r="http://schemas.openxmlformats.org/officeDocument/2006/relationships" r:id="Rb6aa662eac9f47b6"/>
+            <a:hlinkClick xmlns:r="http://schemas.openxmlformats.org/officeDocument/2006/relationships" r:id="Rdb34da8b7d1541ba"/>
           </p:cNvPr>
           <p:cNvSpPr/>
           <p:nvPr/>
@@ -2010,7 +2010,7 @@
       <p:sp>
         <p:nvSpPr>
           <p:cNvPr id="4" name="RoundRect 4">
-            <a:hlinkClick xmlns:r="http://schemas.openxmlformats.org/officeDocument/2006/relationships" r:id="R607186c9dded4856" action="ppaction://hlinksldjump"/>
+            <a:hlinkClick xmlns:r="http://schemas.openxmlformats.org/officeDocument/2006/relationships" r:id="R92ad2df3a9564346" action="ppaction://hlinksldjump"/>
           </p:cNvPr>
           <p:cNvSpPr/>
           <p:nvPr/>

--- a/fixtures/manual-check/pptx-showcase.pptx
+++ b/fixtures/manual-check/pptx-showcase.pptx
@@ -5,16 +5,16 @@
     <p:sldMasterId xmlns:r="http://schemas.openxmlformats.org/officeDocument/2006/relationships" id="2147483648" r:id="rId1"/>
   </p:sldMasterIdLst>
   <p:notesMasterIdLst>
-    <p:notesMasterId r:id="R6966ed8a03d74608"/>
+    <p:notesMasterId r:id="R8f36a0ac1c724416"/>
   </p:notesMasterIdLst>
   <p:sldIdLst>
     <p:sldId xmlns:r="http://schemas.openxmlformats.org/officeDocument/2006/relationships" id="256" r:id="rId2"/>
-    <p:sldId id="257" r:id="R624a9023b2c24525"/>
-    <p:sldId id="258" r:id="R93de2f7166d446d7"/>
-    <p:sldId id="259" r:id="R23a38976ce2245c6"/>
-    <p:sldId id="260" r:id="R192112d1ad5f4126"/>
-    <p:sldId id="261" r:id="Rfb4154e8de5b463e"/>
-    <p:sldId id="262" r:id="Rb5efa6b9fb3a47f8"/>
+    <p:sldId id="257" r:id="Rcabea8f4d53c4df8"/>
+    <p:sldId id="258" r:id="R2b2507616f3c451b"/>
+    <p:sldId id="259" r:id="Rec98f30f20054d8b"/>
+    <p:sldId id="260" r:id="R836a1ac3ed244119"/>
+    <p:sldId id="261" r:id="R8b6ed51dbbc547d6"/>
+    <p:sldId id="262" r:id="Rb04e577c0672413d"/>
   </p:sldIdLst>
   <p:sldSz cx="12192000" cy="6858000"/>
   <p:notesSz cx="6858000" cy="9144000"/>
@@ -31,7 +31,7 @@
 
 <file path=ppt/comments/comment1.xml><?xml version="1.0" encoding="utf-8"?>
 <p:cmLst xmlns:p="http://schemas.openxmlformats.org/presentationml/2006/main">
-  <p:cm authorId="0" dt="2026-06-15T03:24:49.390187Z" idx="1">
+  <p:cm authorId="0" dt="2026-06-15T05:01:52.155053Z" idx="1">
     <p:pos x="0" y="0"/>
     <p:text>Added by aioffice M4 — check the comments pane.</p:text>
   </p:cm>
@@ -40,11 +40,11 @@
 
 <file path=ppt/comments/comment2.xml><?xml version="1.0" encoding="utf-8"?>
 <p:cmLst xmlns:p="http://schemas.openxmlformats.org/presentationml/2006/main">
-  <p:cm authorId="0" dt="2026-06-15T03:24:49.406034Z" idx="2">
+  <p:cm authorId="0" dt="2026-06-15T05:01:52.198176Z" idx="2">
     <p:pos x="0" y="0"/>
     <p:text>M5 thread root — expand to see the reply.</p:text>
   </p:cm>
-  <p:cm authorId="1" dt="2026-06-15T03:24:49.408711Z" idx="3">
+  <p:cm authorId="1" dt="2026-06-15T05:01:52.202492Z" idx="3">
     <p:pos x="0" y="0"/>
     <p:text>Threaded reply added by aioffice M5.</p:text>
     <p:extLst>
@@ -538,7 +538,7 @@
     </c:plotArea>
     <c:plotVisOnly val="1"/>
   </c:chart>
-  <c:externalData r:id="Rd2cbf666402e40a0">
+  <c:externalData r:id="Rdf793ce03a844c3c">
     <c:autoUpdate val="0"/>
   </c:externalData>
 </c:chartSpace>
@@ -770,7 +770,7 @@
           <p:nvPr/>
         </p:nvPicPr>
         <p:blipFill>
-          <a:blip xmlns:r="http://schemas.openxmlformats.org/officeDocument/2006/relationships" xmlns:a="http://schemas.openxmlformats.org/drawingml/2006/main" r:embed="R001a57295fb74728"/>
+          <a:blip xmlns:r="http://schemas.openxmlformats.org/officeDocument/2006/relationships" xmlns:a="http://schemas.openxmlformats.org/drawingml/2006/main" r:embed="R48d66e72702d4471"/>
           <a:stretch xmlns:a="http://schemas.openxmlformats.org/drawingml/2006/main">
             <a:fillRect/>
           </a:stretch>
@@ -847,7 +847,7 @@
         </p:xfrm>
         <a:graphic xmlns:a="http://schemas.openxmlformats.org/drawingml/2006/main">
           <a:graphicData uri="http://schemas.openxmlformats.org/drawingml/2006/chart">
-            <c:chart xmlns:r="http://schemas.openxmlformats.org/officeDocument/2006/relationships" xmlns:c="http://schemas.openxmlformats.org/drawingml/2006/chart" r:id="R7a6a73925f2646b5"/>
+            <c:chart xmlns:r="http://schemas.openxmlformats.org/officeDocument/2006/relationships" xmlns:c="http://schemas.openxmlformats.org/drawingml/2006/chart" r:id="R4b924e8a16024a2d"/>
           </a:graphicData>
         </a:graphic>
       </p:graphicFrame>
@@ -1974,7 +1974,7 @@
       <p:sp>
         <p:nvSpPr>
           <p:cNvPr id="3" name="RoundRect 3">
-            <a:hlinkClick xmlns:r="http://schemas.openxmlformats.org/officeDocument/2006/relationships" r:id="Rdb34da8b7d1541ba"/>
+            <a:hlinkClick xmlns:r="http://schemas.openxmlformats.org/officeDocument/2006/relationships" r:id="R971e3eee30534809"/>
           </p:cNvPr>
           <p:cNvSpPr/>
           <p:nvPr/>
@@ -2010,7 +2010,7 @@
       <p:sp>
         <p:nvSpPr>
           <p:cNvPr id="4" name="RoundRect 4">
-            <a:hlinkClick xmlns:r="http://schemas.openxmlformats.org/officeDocument/2006/relationships" r:id="R92ad2df3a9564346" action="ppaction://hlinksldjump"/>
+            <a:hlinkClick xmlns:r="http://schemas.openxmlformats.org/officeDocument/2006/relationships" r:id="Rf2fc845cc2214920" action="ppaction://hlinksldjump"/>
           </p:cNvPr>
           <p:cNvSpPr/>
           <p:nvPr/>

--- a/fixtures/manual-check/pptx-showcase.pptx
+++ b/fixtures/manual-check/pptx-showcase.pptx
@@ -5,16 +5,16 @@
     <p:sldMasterId xmlns:r="http://schemas.openxmlformats.org/officeDocument/2006/relationships" id="2147483648" r:id="rId1"/>
   </p:sldMasterIdLst>
   <p:notesMasterIdLst>
-    <p:notesMasterId r:id="R8f36a0ac1c724416"/>
+    <p:notesMasterId r:id="Rb71292f688a84cf2"/>
   </p:notesMasterIdLst>
   <p:sldIdLst>
     <p:sldId xmlns:r="http://schemas.openxmlformats.org/officeDocument/2006/relationships" id="256" r:id="rId2"/>
-    <p:sldId id="257" r:id="Rcabea8f4d53c4df8"/>
-    <p:sldId id="258" r:id="R2b2507616f3c451b"/>
-    <p:sldId id="259" r:id="Rec98f30f20054d8b"/>
-    <p:sldId id="260" r:id="R836a1ac3ed244119"/>
-    <p:sldId id="261" r:id="R8b6ed51dbbc547d6"/>
-    <p:sldId id="262" r:id="Rb04e577c0672413d"/>
+    <p:sldId id="257" r:id="Ra017fa75720a4407"/>
+    <p:sldId id="258" r:id="R286dc21866614bb0"/>
+    <p:sldId id="259" r:id="Rd81f8060f5994954"/>
+    <p:sldId id="260" r:id="Ra0db01f46b334a5f"/>
+    <p:sldId id="261" r:id="Rb3947d78b93642b4"/>
+    <p:sldId id="262" r:id="Rc6de707618394d04"/>
   </p:sldIdLst>
   <p:sldSz cx="12192000" cy="6858000"/>
   <p:notesSz cx="6858000" cy="9144000"/>
@@ -31,7 +31,7 @@
 
 <file path=ppt/comments/comment1.xml><?xml version="1.0" encoding="utf-8"?>
 <p:cmLst xmlns:p="http://schemas.openxmlformats.org/presentationml/2006/main">
-  <p:cm authorId="0" dt="2026-06-15T05:01:52.155053Z" idx="1">
+  <p:cm authorId="0" dt="2026-06-15T07:48:16.715163Z" idx="1">
     <p:pos x="0" y="0"/>
     <p:text>Added by aioffice M4 — check the comments pane.</p:text>
   </p:cm>
@@ -40,11 +40,11 @@
 
 <file path=ppt/comments/comment2.xml><?xml version="1.0" encoding="utf-8"?>
 <p:cmLst xmlns:p="http://schemas.openxmlformats.org/presentationml/2006/main">
-  <p:cm authorId="0" dt="2026-06-15T05:01:52.198176Z" idx="2">
+  <p:cm authorId="0" dt="2026-06-15T07:48:16.774789Z" idx="2">
     <p:pos x="0" y="0"/>
     <p:text>M5 thread root — expand to see the reply.</p:text>
   </p:cm>
-  <p:cm authorId="1" dt="2026-06-15T05:01:52.202492Z" idx="3">
+  <p:cm authorId="1" dt="2026-06-15T07:48:16.808825Z" idx="3">
     <p:pos x="0" y="0"/>
     <p:text>Threaded reply added by aioffice M5.</p:text>
     <p:extLst>
@@ -538,7 +538,7 @@
     </c:plotArea>
     <c:plotVisOnly val="1"/>
   </c:chart>
-  <c:externalData r:id="Rdf793ce03a844c3c">
+  <c:externalData r:id="Ref47959108254805">
     <c:autoUpdate val="0"/>
   </c:externalData>
 </c:chartSpace>
@@ -770,7 +770,7 @@
           <p:nvPr/>
         </p:nvPicPr>
         <p:blipFill>
-          <a:blip xmlns:r="http://schemas.openxmlformats.org/officeDocument/2006/relationships" xmlns:a="http://schemas.openxmlformats.org/drawingml/2006/main" r:embed="R48d66e72702d4471"/>
+          <a:blip xmlns:r="http://schemas.openxmlformats.org/officeDocument/2006/relationships" xmlns:a="http://schemas.openxmlformats.org/drawingml/2006/main" r:embed="Ra0515d2e2baa4c88"/>
           <a:stretch xmlns:a="http://schemas.openxmlformats.org/drawingml/2006/main">
             <a:fillRect/>
           </a:stretch>
@@ -847,7 +847,7 @@
         </p:xfrm>
         <a:graphic xmlns:a="http://schemas.openxmlformats.org/drawingml/2006/main">
           <a:graphicData uri="http://schemas.openxmlformats.org/drawingml/2006/chart">
-            <c:chart xmlns:r="http://schemas.openxmlformats.org/officeDocument/2006/relationships" xmlns:c="http://schemas.openxmlformats.org/drawingml/2006/chart" r:id="R4b924e8a16024a2d"/>
+            <c:chart xmlns:r="http://schemas.openxmlformats.org/officeDocument/2006/relationships" xmlns:c="http://schemas.openxmlformats.org/drawingml/2006/chart" r:id="R7e77bbdbda8c4dfd"/>
           </a:graphicData>
         </a:graphic>
       </p:graphicFrame>
@@ -1974,7 +1974,7 @@
       <p:sp>
         <p:nvSpPr>
           <p:cNvPr id="3" name="RoundRect 3">
-            <a:hlinkClick xmlns:r="http://schemas.openxmlformats.org/officeDocument/2006/relationships" r:id="R971e3eee30534809"/>
+            <a:hlinkClick xmlns:r="http://schemas.openxmlformats.org/officeDocument/2006/relationships" r:id="R8052e426f9f5420e"/>
           </p:cNvPr>
           <p:cNvSpPr/>
           <p:nvPr/>
@@ -2010,7 +2010,7 @@
       <p:sp>
         <p:nvSpPr>
           <p:cNvPr id="4" name="RoundRect 4">
-            <a:hlinkClick xmlns:r="http://schemas.openxmlformats.org/officeDocument/2006/relationships" r:id="Rf2fc845cc2214920" action="ppaction://hlinksldjump"/>
+            <a:hlinkClick xmlns:r="http://schemas.openxmlformats.org/officeDocument/2006/relationships" r:id="Ra447a378b21941f0" action="ppaction://hlinksldjump"/>
           </p:cNvPr>
           <p:cNvSpPr/>
           <p:nvPr/>

--- a/fixtures/manual-check/pptx-showcase.pptx
+++ b/fixtures/manual-check/pptx-showcase.pptx
@@ -5,16 +5,16 @@
     <p:sldMasterId xmlns:r="http://schemas.openxmlformats.org/officeDocument/2006/relationships" id="2147483648" r:id="rId1"/>
   </p:sldMasterIdLst>
   <p:notesMasterIdLst>
-    <p:notesMasterId r:id="Rb71292f688a84cf2"/>
+    <p:notesMasterId r:id="R78a2af6ddaee4217"/>
   </p:notesMasterIdLst>
   <p:sldIdLst>
     <p:sldId xmlns:r="http://schemas.openxmlformats.org/officeDocument/2006/relationships" id="256" r:id="rId2"/>
-    <p:sldId id="257" r:id="Ra017fa75720a4407"/>
-    <p:sldId id="258" r:id="R286dc21866614bb0"/>
-    <p:sldId id="259" r:id="Rd81f8060f5994954"/>
-    <p:sldId id="260" r:id="Ra0db01f46b334a5f"/>
-    <p:sldId id="261" r:id="Rb3947d78b93642b4"/>
-    <p:sldId id="262" r:id="Rc6de707618394d04"/>
+    <p:sldId id="257" r:id="Rf74296a5ca774665"/>
+    <p:sldId id="258" r:id="Rf5ed62deafa84a4c"/>
+    <p:sldId id="259" r:id="Rd21f71835caa4890"/>
+    <p:sldId id="260" r:id="R8c4fdac8c3b340bd"/>
+    <p:sldId id="261" r:id="Ra17c2ff4ea7140d2"/>
+    <p:sldId id="262" r:id="R00496ff1e79248d5"/>
   </p:sldIdLst>
   <p:sldSz cx="12192000" cy="6858000"/>
   <p:notesSz cx="6858000" cy="9144000"/>
@@ -31,7 +31,7 @@
 
 <file path=ppt/comments/comment1.xml><?xml version="1.0" encoding="utf-8"?>
 <p:cmLst xmlns:p="http://schemas.openxmlformats.org/presentationml/2006/main">
-  <p:cm authorId="0" dt="2026-06-15T07:48:16.715163Z" idx="1">
+  <p:cm authorId="0" dt="2026-06-15T09:35:19.921676Z" idx="1">
     <p:pos x="0" y="0"/>
     <p:text>Added by aioffice M4 — check the comments pane.</p:text>
   </p:cm>
@@ -40,11 +40,11 @@
 
 <file path=ppt/comments/comment2.xml><?xml version="1.0" encoding="utf-8"?>
 <p:cmLst xmlns:p="http://schemas.openxmlformats.org/presentationml/2006/main">
-  <p:cm authorId="0" dt="2026-06-15T07:48:16.774789Z" idx="2">
+  <p:cm authorId="0" dt="2026-06-15T09:35:19.955915Z" idx="2">
     <p:pos x="0" y="0"/>
     <p:text>M5 thread root — expand to see the reply.</p:text>
   </p:cm>
-  <p:cm authorId="1" dt="2026-06-15T07:48:16.808825Z" idx="3">
+  <p:cm authorId="1" dt="2026-06-15T09:35:19.959028Z" idx="3">
     <p:pos x="0" y="0"/>
     <p:text>Threaded reply added by aioffice M5.</p:text>
     <p:extLst>
@@ -538,7 +538,7 @@
     </c:plotArea>
     <c:plotVisOnly val="1"/>
   </c:chart>
-  <c:externalData r:id="Ref47959108254805">
+  <c:externalData r:id="Ra9d1931a7eb94756">
     <c:autoUpdate val="0"/>
   </c:externalData>
 </c:chartSpace>
@@ -770,7 +770,7 @@
           <p:nvPr/>
         </p:nvPicPr>
         <p:blipFill>
-          <a:blip xmlns:r="http://schemas.openxmlformats.org/officeDocument/2006/relationships" xmlns:a="http://schemas.openxmlformats.org/drawingml/2006/main" r:embed="Ra0515d2e2baa4c88"/>
+          <a:blip xmlns:r="http://schemas.openxmlformats.org/officeDocument/2006/relationships" xmlns:a="http://schemas.openxmlformats.org/drawingml/2006/main" r:embed="Rd6a64f6608da42d4"/>
           <a:stretch xmlns:a="http://schemas.openxmlformats.org/drawingml/2006/main">
             <a:fillRect/>
           </a:stretch>
@@ -847,7 +847,7 @@
         </p:xfrm>
         <a:graphic xmlns:a="http://schemas.openxmlformats.org/drawingml/2006/main">
           <a:graphicData uri="http://schemas.openxmlformats.org/drawingml/2006/chart">
-            <c:chart xmlns:r="http://schemas.openxmlformats.org/officeDocument/2006/relationships" xmlns:c="http://schemas.openxmlformats.org/drawingml/2006/chart" r:id="R7e77bbdbda8c4dfd"/>
+            <c:chart xmlns:r="http://schemas.openxmlformats.org/officeDocument/2006/relationships" xmlns:c="http://schemas.openxmlformats.org/drawingml/2006/chart" r:id="R2415faf840924795"/>
           </a:graphicData>
         </a:graphic>
       </p:graphicFrame>
@@ -1974,7 +1974,7 @@
       <p:sp>
         <p:nvSpPr>
           <p:cNvPr id="3" name="RoundRect 3">
-            <a:hlinkClick xmlns:r="http://schemas.openxmlformats.org/officeDocument/2006/relationships" r:id="R8052e426f9f5420e"/>
+            <a:hlinkClick xmlns:r="http://schemas.openxmlformats.org/officeDocument/2006/relationships" r:id="R5d4ead0757dd4302"/>
           </p:cNvPr>
           <p:cNvSpPr/>
           <p:nvPr/>
@@ -2010,7 +2010,7 @@
       <p:sp>
         <p:nvSpPr>
           <p:cNvPr id="4" name="RoundRect 4">
-            <a:hlinkClick xmlns:r="http://schemas.openxmlformats.org/officeDocument/2006/relationships" r:id="Ra447a378b21941f0" action="ppaction://hlinksldjump"/>
+            <a:hlinkClick xmlns:r="http://schemas.openxmlformats.org/officeDocument/2006/relationships" r:id="R7aa58b79b4ab4a9f" action="ppaction://hlinksldjump"/>
           </p:cNvPr>
           <p:cNvSpPr/>
           <p:nvPr/>

--- a/fixtures/manual-check/pptx-showcase.pptx
+++ b/fixtures/manual-check/pptx-showcase.pptx
@@ -5,16 +5,16 @@
     <p:sldMasterId xmlns:r="http://schemas.openxmlformats.org/officeDocument/2006/relationships" id="2147483648" r:id="rId1"/>
   </p:sldMasterIdLst>
   <p:notesMasterIdLst>
-    <p:notesMasterId r:id="R78a2af6ddaee4217"/>
+    <p:notesMasterId r:id="R6367d0028f4e40c4"/>
   </p:notesMasterIdLst>
   <p:sldIdLst>
     <p:sldId xmlns:r="http://schemas.openxmlformats.org/officeDocument/2006/relationships" id="256" r:id="rId2"/>
-    <p:sldId id="257" r:id="Rf74296a5ca774665"/>
-    <p:sldId id="258" r:id="Rf5ed62deafa84a4c"/>
-    <p:sldId id="259" r:id="Rd21f71835caa4890"/>
-    <p:sldId id="260" r:id="R8c4fdac8c3b340bd"/>
-    <p:sldId id="261" r:id="Ra17c2ff4ea7140d2"/>
-    <p:sldId id="262" r:id="R00496ff1e79248d5"/>
+    <p:sldId id="257" r:id="Rcc3d52c2675e4879"/>
+    <p:sldId id="258" r:id="R6a642c07a6ec4e12"/>
+    <p:sldId id="259" r:id="R10852ff7a0d2424b"/>
+    <p:sldId id="260" r:id="R4ad05eba5cf94e94"/>
+    <p:sldId id="261" r:id="R91395b7b66ec4be5"/>
+    <p:sldId id="262" r:id="R3d96bbd121e34057"/>
   </p:sldIdLst>
   <p:sldSz cx="12192000" cy="6858000"/>
   <p:notesSz cx="6858000" cy="9144000"/>
@@ -31,7 +31,7 @@
 
 <file path=ppt/comments/comment1.xml><?xml version="1.0" encoding="utf-8"?>
 <p:cmLst xmlns:p="http://schemas.openxmlformats.org/presentationml/2006/main">
-  <p:cm authorId="0" dt="2026-06-15T09:35:19.921676Z" idx="1">
+  <p:cm authorId="0" dt="2026-06-15T11:46:18.891985Z" idx="1">
     <p:pos x="0" y="0"/>
     <p:text>Added by aioffice M4 — check the comments pane.</p:text>
   </p:cm>
@@ -40,11 +40,11 @@
 
 <file path=ppt/comments/comment2.xml><?xml version="1.0" encoding="utf-8"?>
 <p:cmLst xmlns:p="http://schemas.openxmlformats.org/presentationml/2006/main">
-  <p:cm authorId="0" dt="2026-06-15T09:35:19.955915Z" idx="2">
+  <p:cm authorId="0" dt="2026-06-15T11:46:18.973669Z" idx="2">
     <p:pos x="0" y="0"/>
     <p:text>M5 thread root — expand to see the reply.</p:text>
   </p:cm>
-  <p:cm authorId="1" dt="2026-06-15T09:35:19.959028Z" idx="3">
+  <p:cm authorId="1" dt="2026-06-15T11:46:18.976826Z" idx="3">
     <p:pos x="0" y="0"/>
     <p:text>Threaded reply added by aioffice M5.</p:text>
     <p:extLst>
@@ -538,7 +538,7 @@
     </c:plotArea>
     <c:plotVisOnly val="1"/>
   </c:chart>
-  <c:externalData r:id="Ra9d1931a7eb94756">
+  <c:externalData r:id="R76fa3a7709604046">
     <c:autoUpdate val="0"/>
   </c:externalData>
 </c:chartSpace>
@@ -770,7 +770,7 @@
           <p:nvPr/>
         </p:nvPicPr>
         <p:blipFill>
-          <a:blip xmlns:r="http://schemas.openxmlformats.org/officeDocument/2006/relationships" xmlns:a="http://schemas.openxmlformats.org/drawingml/2006/main" r:embed="Rd6a64f6608da42d4"/>
+          <a:blip xmlns:r="http://schemas.openxmlformats.org/officeDocument/2006/relationships" xmlns:a="http://schemas.openxmlformats.org/drawingml/2006/main" r:embed="R209b946e13ea430e"/>
           <a:stretch xmlns:a="http://schemas.openxmlformats.org/drawingml/2006/main">
             <a:fillRect/>
           </a:stretch>
@@ -847,7 +847,7 @@
         </p:xfrm>
         <a:graphic xmlns:a="http://schemas.openxmlformats.org/drawingml/2006/main">
           <a:graphicData uri="http://schemas.openxmlformats.org/drawingml/2006/chart">
-            <c:chart xmlns:r="http://schemas.openxmlformats.org/officeDocument/2006/relationships" xmlns:c="http://schemas.openxmlformats.org/drawingml/2006/chart" r:id="R2415faf840924795"/>
+            <c:chart xmlns:r="http://schemas.openxmlformats.org/officeDocument/2006/relationships" xmlns:c="http://schemas.openxmlformats.org/drawingml/2006/chart" r:id="Rf96ea7e9e8c94927"/>
           </a:graphicData>
         </a:graphic>
       </p:graphicFrame>
@@ -1974,7 +1974,7 @@
       <p:sp>
         <p:nvSpPr>
           <p:cNvPr id="3" name="RoundRect 3">
-            <a:hlinkClick xmlns:r="http://schemas.openxmlformats.org/officeDocument/2006/relationships" r:id="R5d4ead0757dd4302"/>
+            <a:hlinkClick xmlns:r="http://schemas.openxmlformats.org/officeDocument/2006/relationships" r:id="R78afa9a6086b4df4"/>
           </p:cNvPr>
           <p:cNvSpPr/>
           <p:nvPr/>
@@ -2010,7 +2010,7 @@
       <p:sp>
         <p:nvSpPr>
           <p:cNvPr id="4" name="RoundRect 4">
-            <a:hlinkClick xmlns:r="http://schemas.openxmlformats.org/officeDocument/2006/relationships" r:id="R7aa58b79b4ab4a9f" action="ppaction://hlinksldjump"/>
+            <a:hlinkClick xmlns:r="http://schemas.openxmlformats.org/officeDocument/2006/relationships" r:id="Ra765d63623d0494f" action="ppaction://hlinksldjump"/>
           </p:cNvPr>
           <p:cNvSpPr/>
           <p:nvPr/>

--- a/fixtures/manual-check/pptx-showcase.pptx
+++ b/fixtures/manual-check/pptx-showcase.pptx
@@ -5,16 +5,16 @@
     <p:sldMasterId xmlns:r="http://schemas.openxmlformats.org/officeDocument/2006/relationships" id="2147483648" r:id="rId1"/>
   </p:sldMasterIdLst>
   <p:notesMasterIdLst>
-    <p:notesMasterId r:id="R6367d0028f4e40c4"/>
+    <p:notesMasterId r:id="R501111978f1e4f87"/>
   </p:notesMasterIdLst>
   <p:sldIdLst>
     <p:sldId xmlns:r="http://schemas.openxmlformats.org/officeDocument/2006/relationships" id="256" r:id="rId2"/>
-    <p:sldId id="257" r:id="Rcc3d52c2675e4879"/>
-    <p:sldId id="258" r:id="R6a642c07a6ec4e12"/>
-    <p:sldId id="259" r:id="R10852ff7a0d2424b"/>
-    <p:sldId id="260" r:id="R4ad05eba5cf94e94"/>
-    <p:sldId id="261" r:id="R91395b7b66ec4be5"/>
-    <p:sldId id="262" r:id="R3d96bbd121e34057"/>
+    <p:sldId id="257" r:id="Rd75ad61425304ea9"/>
+    <p:sldId id="258" r:id="R1c7016a8f2864886"/>
+    <p:sldId id="259" r:id="Rae1fe7ee3d494345"/>
+    <p:sldId id="260" r:id="R444fcb98abda4741"/>
+    <p:sldId id="261" r:id="Rdc3ff82735954abd"/>
+    <p:sldId id="262" r:id="R66321d707ccf4eb2"/>
   </p:sldIdLst>
   <p:sldSz cx="12192000" cy="6858000"/>
   <p:notesSz cx="6858000" cy="9144000"/>
@@ -31,7 +31,7 @@
 
 <file path=ppt/comments/comment1.xml><?xml version="1.0" encoding="utf-8"?>
 <p:cmLst xmlns:p="http://schemas.openxmlformats.org/presentationml/2006/main">
-  <p:cm authorId="0" dt="2026-06-15T11:46:18.891985Z" idx="1">
+  <p:cm authorId="0" dt="2026-06-15T13:01:17.974162Z" idx="1">
     <p:pos x="0" y="0"/>
     <p:text>Added by aioffice M4 — check the comments pane.</p:text>
   </p:cm>
@@ -40,11 +40,11 @@
 
 <file path=ppt/comments/comment2.xml><?xml version="1.0" encoding="utf-8"?>
 <p:cmLst xmlns:p="http://schemas.openxmlformats.org/presentationml/2006/main">
-  <p:cm authorId="0" dt="2026-06-15T11:46:18.973669Z" idx="2">
+  <p:cm authorId="0" dt="2026-06-15T13:01:18.095691Z" idx="2">
     <p:pos x="0" y="0"/>
     <p:text>M5 thread root — expand to see the reply.</p:text>
   </p:cm>
-  <p:cm authorId="1" dt="2026-06-15T11:46:18.976826Z" idx="3">
+  <p:cm authorId="1" dt="2026-06-15T13:01:18.103784Z" idx="3">
     <p:pos x="0" y="0"/>
     <p:text>Threaded reply added by aioffice M5.</p:text>
     <p:extLst>
@@ -538,7 +538,7 @@
     </c:plotArea>
     <c:plotVisOnly val="1"/>
   </c:chart>
-  <c:externalData r:id="R76fa3a7709604046">
+  <c:externalData r:id="R1659227a3e5c44fd">
     <c:autoUpdate val="0"/>
   </c:externalData>
 </c:chartSpace>
@@ -770,7 +770,7 @@
           <p:nvPr/>
         </p:nvPicPr>
         <p:blipFill>
-          <a:blip xmlns:r="http://schemas.openxmlformats.org/officeDocument/2006/relationships" xmlns:a="http://schemas.openxmlformats.org/drawingml/2006/main" r:embed="R209b946e13ea430e"/>
+          <a:blip xmlns:r="http://schemas.openxmlformats.org/officeDocument/2006/relationships" xmlns:a="http://schemas.openxmlformats.org/drawingml/2006/main" r:embed="R3bd1bfda8f9a46d2"/>
           <a:stretch xmlns:a="http://schemas.openxmlformats.org/drawingml/2006/main">
             <a:fillRect/>
           </a:stretch>
@@ -847,7 +847,7 @@
         </p:xfrm>
         <a:graphic xmlns:a="http://schemas.openxmlformats.org/drawingml/2006/main">
           <a:graphicData uri="http://schemas.openxmlformats.org/drawingml/2006/chart">
-            <c:chart xmlns:r="http://schemas.openxmlformats.org/officeDocument/2006/relationships" xmlns:c="http://schemas.openxmlformats.org/drawingml/2006/chart" r:id="Rf96ea7e9e8c94927"/>
+            <c:chart xmlns:r="http://schemas.openxmlformats.org/officeDocument/2006/relationships" xmlns:c="http://schemas.openxmlformats.org/drawingml/2006/chart" r:id="R886b404132824ede"/>
           </a:graphicData>
         </a:graphic>
       </p:graphicFrame>
@@ -1974,7 +1974,7 @@
       <p:sp>
         <p:nvSpPr>
           <p:cNvPr id="3" name="RoundRect 3">
-            <a:hlinkClick xmlns:r="http://schemas.openxmlformats.org/officeDocument/2006/relationships" r:id="R78afa9a6086b4df4"/>
+            <a:hlinkClick xmlns:r="http://schemas.openxmlformats.org/officeDocument/2006/relationships" r:id="Rf0263fa9dc7a4887"/>
           </p:cNvPr>
           <p:cNvSpPr/>
           <p:nvPr/>
@@ -2010,7 +2010,7 @@
       <p:sp>
         <p:nvSpPr>
           <p:cNvPr id="4" name="RoundRect 4">
-            <a:hlinkClick xmlns:r="http://schemas.openxmlformats.org/officeDocument/2006/relationships" r:id="Ra765d63623d0494f" action="ppaction://hlinksldjump"/>
+            <a:hlinkClick xmlns:r="http://schemas.openxmlformats.org/officeDocument/2006/relationships" r:id="R4a0dfd6212be44f0" action="ppaction://hlinksldjump"/>
           </p:cNvPr>
           <p:cNvSpPr/>
           <p:nvPr/>

--- a/fixtures/manual-check/pptx-showcase.pptx
+++ b/fixtures/manual-check/pptx-showcase.pptx
@@ -5,16 +5,16 @@
     <p:sldMasterId xmlns:r="http://schemas.openxmlformats.org/officeDocument/2006/relationships" id="2147483648" r:id="rId1"/>
   </p:sldMasterIdLst>
   <p:notesMasterIdLst>
-    <p:notesMasterId r:id="R501111978f1e4f87"/>
+    <p:notesMasterId r:id="R80c092db75224d53"/>
   </p:notesMasterIdLst>
   <p:sldIdLst>
     <p:sldId xmlns:r="http://schemas.openxmlformats.org/officeDocument/2006/relationships" id="256" r:id="rId2"/>
-    <p:sldId id="257" r:id="Rd75ad61425304ea9"/>
-    <p:sldId id="258" r:id="R1c7016a8f2864886"/>
-    <p:sldId id="259" r:id="Rae1fe7ee3d494345"/>
-    <p:sldId id="260" r:id="R444fcb98abda4741"/>
-    <p:sldId id="261" r:id="Rdc3ff82735954abd"/>
-    <p:sldId id="262" r:id="R66321d707ccf4eb2"/>
+    <p:sldId id="257" r:id="Ra062cef7fc174502"/>
+    <p:sldId id="258" r:id="R0c3f495850a9474e"/>
+    <p:sldId id="259" r:id="R71172ec2b76748cd"/>
+    <p:sldId id="260" r:id="Rc4236651fd964e56"/>
+    <p:sldId id="261" r:id="R85ca490eee684742"/>
+    <p:sldId id="262" r:id="R536161a6bd3a48a0"/>
   </p:sldIdLst>
   <p:sldSz cx="12192000" cy="6858000"/>
   <p:notesSz cx="6858000" cy="9144000"/>
@@ -31,7 +31,7 @@
 
 <file path=ppt/comments/comment1.xml><?xml version="1.0" encoding="utf-8"?>
 <p:cmLst xmlns:p="http://schemas.openxmlformats.org/presentationml/2006/main">
-  <p:cm authorId="0" dt="2026-06-15T13:01:17.974162Z" idx="1">
+  <p:cm authorId="0" dt="2026-06-15T15:41:16.222349Z" idx="1">
     <p:pos x="0" y="0"/>
     <p:text>Added by aioffice M4 — check the comments pane.</p:text>
   </p:cm>
@@ -40,11 +40,11 @@
 
 <file path=ppt/comments/comment2.xml><?xml version="1.0" encoding="utf-8"?>
 <p:cmLst xmlns:p="http://schemas.openxmlformats.org/presentationml/2006/main">
-  <p:cm authorId="0" dt="2026-06-15T13:01:18.095691Z" idx="2">
+  <p:cm authorId="0" dt="2026-06-15T15:41:16.246774Z" idx="2">
     <p:pos x="0" y="0"/>
     <p:text>M5 thread root — expand to see the reply.</p:text>
   </p:cm>
-  <p:cm authorId="1" dt="2026-06-15T13:01:18.103784Z" idx="3">
+  <p:cm authorId="1" dt="2026-06-15T15:41:16.250955Z" idx="3">
     <p:pos x="0" y="0"/>
     <p:text>Threaded reply added by aioffice M5.</p:text>
     <p:extLst>
@@ -538,7 +538,7 @@
     </c:plotArea>
     <c:plotVisOnly val="1"/>
   </c:chart>
-  <c:externalData r:id="R1659227a3e5c44fd">
+  <c:externalData r:id="R04a5d7f8e2c84ae4">
     <c:autoUpdate val="0"/>
   </c:externalData>
 </c:chartSpace>
@@ -770,7 +770,7 @@
           <p:nvPr/>
         </p:nvPicPr>
         <p:blipFill>
-          <a:blip xmlns:r="http://schemas.openxmlformats.org/officeDocument/2006/relationships" xmlns:a="http://schemas.openxmlformats.org/drawingml/2006/main" r:embed="R3bd1bfda8f9a46d2"/>
+          <a:blip xmlns:r="http://schemas.openxmlformats.org/officeDocument/2006/relationships" xmlns:a="http://schemas.openxmlformats.org/drawingml/2006/main" r:embed="R64455a3d0797444a"/>
           <a:stretch xmlns:a="http://schemas.openxmlformats.org/drawingml/2006/main">
             <a:fillRect/>
           </a:stretch>
@@ -847,7 +847,7 @@
         </p:xfrm>
         <a:graphic xmlns:a="http://schemas.openxmlformats.org/drawingml/2006/main">
           <a:graphicData uri="http://schemas.openxmlformats.org/drawingml/2006/chart">
-            <c:chart xmlns:r="http://schemas.openxmlformats.org/officeDocument/2006/relationships" xmlns:c="http://schemas.openxmlformats.org/drawingml/2006/chart" r:id="R886b404132824ede"/>
+            <c:chart xmlns:r="http://schemas.openxmlformats.org/officeDocument/2006/relationships" xmlns:c="http://schemas.openxmlformats.org/drawingml/2006/chart" r:id="R90539367e7f34384"/>
           </a:graphicData>
         </a:graphic>
       </p:graphicFrame>
@@ -1974,7 +1974,7 @@
       <p:sp>
         <p:nvSpPr>
           <p:cNvPr id="3" name="RoundRect 3">
-            <a:hlinkClick xmlns:r="http://schemas.openxmlformats.org/officeDocument/2006/relationships" r:id="Rf0263fa9dc7a4887"/>
+            <a:hlinkClick xmlns:r="http://schemas.openxmlformats.org/officeDocument/2006/relationships" r:id="R3ef159a000bb4150"/>
           </p:cNvPr>
           <p:cNvSpPr/>
           <p:nvPr/>
@@ -2010,7 +2010,7 @@
       <p:sp>
         <p:nvSpPr>
           <p:cNvPr id="4" name="RoundRect 4">
-            <a:hlinkClick xmlns:r="http://schemas.openxmlformats.org/officeDocument/2006/relationships" r:id="R4a0dfd6212be44f0" action="ppaction://hlinksldjump"/>
+            <a:hlinkClick xmlns:r="http://schemas.openxmlformats.org/officeDocument/2006/relationships" r:id="R65f211bded6349bf" action="ppaction://hlinksldjump"/>
           </p:cNvPr>
           <p:cNvSpPr/>
           <p:nvPr/>

--- a/fixtures/manual-check/pptx-showcase.pptx
+++ b/fixtures/manual-check/pptx-showcase.pptx
@@ -5,16 +5,16 @@
     <p:sldMasterId xmlns:r="http://schemas.openxmlformats.org/officeDocument/2006/relationships" id="2147483648" r:id="rId1"/>
   </p:sldMasterIdLst>
   <p:notesMasterIdLst>
-    <p:notesMasterId r:id="R80c092db75224d53"/>
+    <p:notesMasterId r:id="R85549b98b5994a45"/>
   </p:notesMasterIdLst>
   <p:sldIdLst>
     <p:sldId xmlns:r="http://schemas.openxmlformats.org/officeDocument/2006/relationships" id="256" r:id="rId2"/>
-    <p:sldId id="257" r:id="Ra062cef7fc174502"/>
-    <p:sldId id="258" r:id="R0c3f495850a9474e"/>
-    <p:sldId id="259" r:id="R71172ec2b76748cd"/>
-    <p:sldId id="260" r:id="Rc4236651fd964e56"/>
-    <p:sldId id="261" r:id="R85ca490eee684742"/>
-    <p:sldId id="262" r:id="R536161a6bd3a48a0"/>
+    <p:sldId id="257" r:id="R7a8572f00c554941"/>
+    <p:sldId id="258" r:id="R84d5ebfc7d7647de"/>
+    <p:sldId id="259" r:id="Re638614917ba46a1"/>
+    <p:sldId id="260" r:id="Rf33d8a0377e040e2"/>
+    <p:sldId id="261" r:id="R2dbe9ca178664db4"/>
+    <p:sldId id="262" r:id="R6b8cbe85233b4539"/>
   </p:sldIdLst>
   <p:sldSz cx="12192000" cy="6858000"/>
   <p:notesSz cx="6858000" cy="9144000"/>
@@ -31,7 +31,7 @@
 
 <file path=ppt/comments/comment1.xml><?xml version="1.0" encoding="utf-8"?>
 <p:cmLst xmlns:p="http://schemas.openxmlformats.org/presentationml/2006/main">
-  <p:cm authorId="0" dt="2026-06-15T15:41:16.222349Z" idx="1">
+  <p:cm authorId="0" dt="2026-07-13T07:48:06.311765Z" idx="1">
     <p:pos x="0" y="0"/>
     <p:text>Added by aioffice M4 — check the comments pane.</p:text>
   </p:cm>
@@ -40,11 +40,11 @@
 
 <file path=ppt/comments/comment2.xml><?xml version="1.0" encoding="utf-8"?>
 <p:cmLst xmlns:p="http://schemas.openxmlformats.org/presentationml/2006/main">
-  <p:cm authorId="0" dt="2026-06-15T15:41:16.246774Z" idx="2">
+  <p:cm authorId="0" dt="2026-07-13T07:48:06.32351Z" idx="2">
     <p:pos x="0" y="0"/>
     <p:text>M5 thread root — expand to see the reply.</p:text>
   </p:cm>
-  <p:cm authorId="1" dt="2026-06-15T15:41:16.250955Z" idx="3">
+  <p:cm authorId="1" dt="2026-07-13T07:48:06.32605Z" idx="3">
     <p:pos x="0" y="0"/>
     <p:text>Threaded reply added by aioffice M5.</p:text>
     <p:extLst>
@@ -538,7 +538,7 @@
     </c:plotArea>
     <c:plotVisOnly val="1"/>
   </c:chart>
-  <c:externalData r:id="R04a5d7f8e2c84ae4">
+  <c:externalData r:id="Rc6214dddde094a6f">
     <c:autoUpdate val="0"/>
   </c:externalData>
 </c:chartSpace>
@@ -770,7 +770,7 @@
           <p:nvPr/>
         </p:nvPicPr>
         <p:blipFill>
-          <a:blip xmlns:r="http://schemas.openxmlformats.org/officeDocument/2006/relationships" xmlns:a="http://schemas.openxmlformats.org/drawingml/2006/main" r:embed="R64455a3d0797444a"/>
+          <a:blip xmlns:r="http://schemas.openxmlformats.org/officeDocument/2006/relationships" xmlns:a="http://schemas.openxmlformats.org/drawingml/2006/main" r:embed="Rd97c164c19b74a5c"/>
           <a:stretch xmlns:a="http://schemas.openxmlformats.org/drawingml/2006/main">
             <a:fillRect/>
           </a:stretch>
@@ -847,7 +847,7 @@
         </p:xfrm>
         <a:graphic xmlns:a="http://schemas.openxmlformats.org/drawingml/2006/main">
           <a:graphicData uri="http://schemas.openxmlformats.org/drawingml/2006/chart">
-            <c:chart xmlns:r="http://schemas.openxmlformats.org/officeDocument/2006/relationships" xmlns:c="http://schemas.openxmlformats.org/drawingml/2006/chart" r:id="R90539367e7f34384"/>
+            <c:chart xmlns:r="http://schemas.openxmlformats.org/officeDocument/2006/relationships" xmlns:c="http://schemas.openxmlformats.org/drawingml/2006/chart" r:id="R12886eff16084b6e"/>
           </a:graphicData>
         </a:graphic>
       </p:graphicFrame>
@@ -1974,7 +1974,7 @@
       <p:sp>
         <p:nvSpPr>
           <p:cNvPr id="3" name="RoundRect 3">
-            <a:hlinkClick xmlns:r="http://schemas.openxmlformats.org/officeDocument/2006/relationships" r:id="R3ef159a000bb4150"/>
+            <a:hlinkClick xmlns:r="http://schemas.openxmlformats.org/officeDocument/2006/relationships" r:id="R5661c39e0c8e4bdb"/>
           </p:cNvPr>
           <p:cNvSpPr/>
           <p:nvPr/>
@@ -2010,7 +2010,7 @@
       <p:sp>
         <p:nvSpPr>
           <p:cNvPr id="4" name="RoundRect 4">
-            <a:hlinkClick xmlns:r="http://schemas.openxmlformats.org/officeDocument/2006/relationships" r:id="R65f211bded6349bf" action="ppaction://hlinksldjump"/>
+            <a:hlinkClick xmlns:r="http://schemas.openxmlformats.org/officeDocument/2006/relationships" r:id="Rc2280bfba962478e" action="ppaction://hlinksldjump"/>
           </p:cNvPr>
           <p:cNvSpPr/>
           <p:nvPr/>
